--- a/Material/sy0-701_Lesson 02.pptx
+++ b/Material/sy0-701_Lesson 02.pptx
@@ -5,10 +5,10 @@
     <p:sldMasterId id="2147483910" r:id="rId4"/>
   </p:sldMasterIdLst>
   <p:notesMasterIdLst>
-    <p:notesMasterId r:id="rId32"/>
+    <p:notesMasterId r:id="rId34"/>
   </p:notesMasterIdLst>
   <p:handoutMasterIdLst>
-    <p:handoutMasterId r:id="rId33"/>
+    <p:handoutMasterId r:id="rId35"/>
   </p:handoutMasterIdLst>
   <p:sldIdLst>
     <p:sldId id="260" r:id="rId5"/>
@@ -30,31 +30,33 @@
     <p:sldId id="320" r:id="rId21"/>
     <p:sldId id="321" r:id="rId22"/>
     <p:sldId id="935" r:id="rId23"/>
-    <p:sldId id="265" r:id="rId24"/>
-    <p:sldId id="303" r:id="rId25"/>
-    <p:sldId id="305" r:id="rId26"/>
-    <p:sldId id="306" r:id="rId27"/>
-    <p:sldId id="307" r:id="rId28"/>
-    <p:sldId id="319" r:id="rId29"/>
-    <p:sldId id="936" r:id="rId30"/>
-    <p:sldId id="932" r:id="rId31"/>
+    <p:sldId id="937" r:id="rId24"/>
+    <p:sldId id="265" r:id="rId25"/>
+    <p:sldId id="303" r:id="rId26"/>
+    <p:sldId id="305" r:id="rId27"/>
+    <p:sldId id="306" r:id="rId28"/>
+    <p:sldId id="307" r:id="rId29"/>
+    <p:sldId id="319" r:id="rId30"/>
+    <p:sldId id="936" r:id="rId31"/>
+    <p:sldId id="938" r:id="rId32"/>
+    <p:sldId id="932" r:id="rId33"/>
   </p:sldIdLst>
   <p:sldSz cx="9144000" cy="5143500" type="screen16x9"/>
   <p:notesSz cx="6858000" cy="9144000"/>
   <p:embeddedFontLst>
     <p:embeddedFont>
       <p:font typeface="Calibri" panose="020F0502020204030204" pitchFamily="34" charset="0"/>
-      <p:regular r:id="rId34"/>
-      <p:bold r:id="rId35"/>
-      <p:italic r:id="rId36"/>
-      <p:boldItalic r:id="rId37"/>
+      <p:regular r:id="rId36"/>
+      <p:bold r:id="rId37"/>
+      <p:italic r:id="rId38"/>
+      <p:boldItalic r:id="rId39"/>
     </p:embeddedFont>
     <p:embeddedFont>
       <p:font typeface="Open Sans" panose="020B0606030504020204" pitchFamily="34" charset="0"/>
-      <p:regular r:id="rId38"/>
-      <p:bold r:id="rId39"/>
-      <p:italic r:id="rId40"/>
-      <p:boldItalic r:id="rId41"/>
+      <p:regular r:id="rId40"/>
+      <p:bold r:id="rId41"/>
+      <p:italic r:id="rId42"/>
+      <p:boldItalic r:id="rId43"/>
     </p:embeddedFont>
   </p:embeddedFontLst>
   <p:defaultTextStyle>
@@ -206,6 +208,1551 @@
 </p:cmAuthorLst>
 </file>
 
+<file path=ppt/changesInfos/changesInfo1.xml><?xml version="1.0" encoding="utf-8"?>
+<pc:chgInfo xmlns:a="http://schemas.openxmlformats.org/drawingml/2006/main" xmlns:r="http://schemas.openxmlformats.org/officeDocument/2006/relationships" xmlns:ac="http://schemas.microsoft.com/office/drawing/2013/main/command" xmlns:pc="http://schemas.microsoft.com/office/powerpoint/2013/main/command">
+  <pc:docChgLst>
+    <pc:chgData name="Danielle Andries" userId="93d179e4-3c18-40f7-920e-ae80b202540d" providerId="ADAL" clId="{26A5FE13-F571-44FC-A3E6-15BD1CDF3479}"/>
+    <pc:docChg chg="custSel addSld modSld">
+      <pc:chgData name="Danielle Andries" userId="93d179e4-3c18-40f7-920e-ae80b202540d" providerId="ADAL" clId="{26A5FE13-F571-44FC-A3E6-15BD1CDF3479}" dt="2023-09-11T17:46:18.056" v="96" actId="20577"/>
+      <pc:docMkLst>
+        <pc:docMk/>
+      </pc:docMkLst>
+      <pc:sldChg chg="addSp delSp modSp new mod modClrScheme chgLayout">
+        <pc:chgData name="Danielle Andries" userId="93d179e4-3c18-40f7-920e-ae80b202540d" providerId="ADAL" clId="{26A5FE13-F571-44FC-A3E6-15BD1CDF3479}" dt="2023-09-11T17:45:55.039" v="41" actId="20577"/>
+        <pc:sldMkLst>
+          <pc:docMk/>
+          <pc:sldMk cId="408307851" sldId="937"/>
+        </pc:sldMkLst>
+        <pc:spChg chg="del mod ord">
+          <ac:chgData name="Danielle Andries" userId="93d179e4-3c18-40f7-920e-ae80b202540d" providerId="ADAL" clId="{26A5FE13-F571-44FC-A3E6-15BD1CDF3479}" dt="2023-09-11T17:45:40.481" v="1" actId="700"/>
+          <ac:spMkLst>
+            <pc:docMk/>
+            <pc:sldMk cId="408307851" sldId="937"/>
+            <ac:spMk id="2" creationId="{2D57CAC1-DC21-FDF5-254D-D53144994B95}"/>
+          </ac:spMkLst>
+        </pc:spChg>
+        <pc:spChg chg="del">
+          <ac:chgData name="Danielle Andries" userId="93d179e4-3c18-40f7-920e-ae80b202540d" providerId="ADAL" clId="{26A5FE13-F571-44FC-A3E6-15BD1CDF3479}" dt="2023-09-11T17:45:40.481" v="1" actId="700"/>
+          <ac:spMkLst>
+            <pc:docMk/>
+            <pc:sldMk cId="408307851" sldId="937"/>
+            <ac:spMk id="3" creationId="{2003DB71-82EC-ABEB-51CE-4A9122E08F25}"/>
+          </ac:spMkLst>
+        </pc:spChg>
+        <pc:spChg chg="mod ord">
+          <ac:chgData name="Danielle Andries" userId="93d179e4-3c18-40f7-920e-ae80b202540d" providerId="ADAL" clId="{26A5FE13-F571-44FC-A3E6-15BD1CDF3479}" dt="2023-09-11T17:45:40.481" v="1" actId="700"/>
+          <ac:spMkLst>
+            <pc:docMk/>
+            <pc:sldMk cId="408307851" sldId="937"/>
+            <ac:spMk id="4" creationId="{3B701D45-5005-6861-560D-B8A7EC1DFFCE}"/>
+          </ac:spMkLst>
+        </pc:spChg>
+        <pc:spChg chg="add mod ord">
+          <ac:chgData name="Danielle Andries" userId="93d179e4-3c18-40f7-920e-ae80b202540d" providerId="ADAL" clId="{26A5FE13-F571-44FC-A3E6-15BD1CDF3479}" dt="2023-09-11T17:45:55.039" v="41" actId="20577"/>
+          <ac:spMkLst>
+            <pc:docMk/>
+            <pc:sldMk cId="408307851" sldId="937"/>
+            <ac:spMk id="5" creationId="{0F7E2146-C7AF-9ADA-8F14-9FF8692BA1B8}"/>
+          </ac:spMkLst>
+        </pc:spChg>
+      </pc:sldChg>
+      <pc:sldChg chg="addSp delSp modSp new mod modClrScheme chgLayout">
+        <pc:chgData name="Danielle Andries" userId="93d179e4-3c18-40f7-920e-ae80b202540d" providerId="ADAL" clId="{26A5FE13-F571-44FC-A3E6-15BD1CDF3479}" dt="2023-09-11T17:46:18.056" v="96" actId="20577"/>
+        <pc:sldMkLst>
+          <pc:docMk/>
+          <pc:sldMk cId="1628770684" sldId="938"/>
+        </pc:sldMkLst>
+        <pc:spChg chg="del mod ord">
+          <ac:chgData name="Danielle Andries" userId="93d179e4-3c18-40f7-920e-ae80b202540d" providerId="ADAL" clId="{26A5FE13-F571-44FC-A3E6-15BD1CDF3479}" dt="2023-09-11T17:46:06.268" v="43" actId="700"/>
+          <ac:spMkLst>
+            <pc:docMk/>
+            <pc:sldMk cId="1628770684" sldId="938"/>
+            <ac:spMk id="2" creationId="{F6084161-3376-47AB-67AD-B47C0FFA5E16}"/>
+          </ac:spMkLst>
+        </pc:spChg>
+        <pc:spChg chg="del">
+          <ac:chgData name="Danielle Andries" userId="93d179e4-3c18-40f7-920e-ae80b202540d" providerId="ADAL" clId="{26A5FE13-F571-44FC-A3E6-15BD1CDF3479}" dt="2023-09-11T17:46:06.268" v="43" actId="700"/>
+          <ac:spMkLst>
+            <pc:docMk/>
+            <pc:sldMk cId="1628770684" sldId="938"/>
+            <ac:spMk id="3" creationId="{9AF19864-D35B-CD2B-CFCD-900FAF45A76A}"/>
+          </ac:spMkLst>
+        </pc:spChg>
+        <pc:spChg chg="mod ord">
+          <ac:chgData name="Danielle Andries" userId="93d179e4-3c18-40f7-920e-ae80b202540d" providerId="ADAL" clId="{26A5FE13-F571-44FC-A3E6-15BD1CDF3479}" dt="2023-09-11T17:46:06.268" v="43" actId="700"/>
+          <ac:spMkLst>
+            <pc:docMk/>
+            <pc:sldMk cId="1628770684" sldId="938"/>
+            <ac:spMk id="4" creationId="{15CBB9D5-2DAC-6A7F-ADE7-8B53182EF9DC}"/>
+          </ac:spMkLst>
+        </pc:spChg>
+        <pc:spChg chg="add mod ord">
+          <ac:chgData name="Danielle Andries" userId="93d179e4-3c18-40f7-920e-ae80b202540d" providerId="ADAL" clId="{26A5FE13-F571-44FC-A3E6-15BD1CDF3479}" dt="2023-09-11T17:46:18.056" v="96" actId="20577"/>
+          <ac:spMkLst>
+            <pc:docMk/>
+            <pc:sldMk cId="1628770684" sldId="938"/>
+            <ac:spMk id="5" creationId="{EEF1EDF6-C418-A1A3-FCF3-F6002DA1003E}"/>
+          </ac:spMkLst>
+        </pc:spChg>
+      </pc:sldChg>
+    </pc:docChg>
+  </pc:docChgLst>
+  <pc:docChgLst>
+    <pc:chgData name="James Pengelly" userId="d269fecd-a8a2-4e5a-93ae-88bdaab21f51" providerId="ADAL" clId="{36A8BE69-29E1-4F13-A49C-C25AE91E6A3E}"/>
+    <pc:docChg chg="custSel addSld delSld modSld">
+      <pc:chgData name="James Pengelly" userId="d269fecd-a8a2-4e5a-93ae-88bdaab21f51" providerId="ADAL" clId="{36A8BE69-29E1-4F13-A49C-C25AE91E6A3E}" dt="2023-09-06T14:52:39.941" v="612" actId="20577"/>
+      <pc:docMkLst>
+        <pc:docMk/>
+      </pc:docMkLst>
+      <pc:sldChg chg="del">
+        <pc:chgData name="James Pengelly" userId="d269fecd-a8a2-4e5a-93ae-88bdaab21f51" providerId="ADAL" clId="{36A8BE69-29E1-4F13-A49C-C25AE91E6A3E}" dt="2023-08-24T13:52:47.429" v="0" actId="47"/>
+        <pc:sldMkLst>
+          <pc:docMk/>
+          <pc:sldMk cId="3760655269" sldId="257"/>
+        </pc:sldMkLst>
+      </pc:sldChg>
+      <pc:sldChg chg="del">
+        <pc:chgData name="James Pengelly" userId="d269fecd-a8a2-4e5a-93ae-88bdaab21f51" providerId="ADAL" clId="{36A8BE69-29E1-4F13-A49C-C25AE91E6A3E}" dt="2023-08-24T13:52:47.429" v="0" actId="47"/>
+        <pc:sldMkLst>
+          <pc:docMk/>
+          <pc:sldMk cId="2338602011" sldId="258"/>
+        </pc:sldMkLst>
+      </pc:sldChg>
+      <pc:sldChg chg="del">
+        <pc:chgData name="James Pengelly" userId="d269fecd-a8a2-4e5a-93ae-88bdaab21f51" providerId="ADAL" clId="{36A8BE69-29E1-4F13-A49C-C25AE91E6A3E}" dt="2023-08-24T13:52:47.429" v="0" actId="47"/>
+        <pc:sldMkLst>
+          <pc:docMk/>
+          <pc:sldMk cId="1550182309" sldId="259"/>
+        </pc:sldMkLst>
+      </pc:sldChg>
+      <pc:sldChg chg="modNotesTx">
+        <pc:chgData name="James Pengelly" userId="d269fecd-a8a2-4e5a-93ae-88bdaab21f51" providerId="ADAL" clId="{36A8BE69-29E1-4F13-A49C-C25AE91E6A3E}" dt="2023-09-06T14:32:19.288" v="581"/>
+        <pc:sldMkLst>
+          <pc:docMk/>
+          <pc:sldMk cId="437917127" sldId="260"/>
+        </pc:sldMkLst>
+      </pc:sldChg>
+      <pc:sldChg chg="del">
+        <pc:chgData name="James Pengelly" userId="d269fecd-a8a2-4e5a-93ae-88bdaab21f51" providerId="ADAL" clId="{36A8BE69-29E1-4F13-A49C-C25AE91E6A3E}" dt="2023-08-24T13:52:53.649" v="1" actId="47"/>
+        <pc:sldMkLst>
+          <pc:docMk/>
+          <pc:sldMk cId="2634730840" sldId="261"/>
+        </pc:sldMkLst>
+      </pc:sldChg>
+      <pc:sldChg chg="del">
+        <pc:chgData name="James Pengelly" userId="d269fecd-a8a2-4e5a-93ae-88bdaab21f51" providerId="ADAL" clId="{36A8BE69-29E1-4F13-A49C-C25AE91E6A3E}" dt="2023-08-24T13:52:53.649" v="1" actId="47"/>
+        <pc:sldMkLst>
+          <pc:docMk/>
+          <pc:sldMk cId="1040517604" sldId="262"/>
+        </pc:sldMkLst>
+      </pc:sldChg>
+      <pc:sldChg chg="del">
+        <pc:chgData name="James Pengelly" userId="d269fecd-a8a2-4e5a-93ae-88bdaab21f51" providerId="ADAL" clId="{36A8BE69-29E1-4F13-A49C-C25AE91E6A3E}" dt="2023-08-24T13:52:53.649" v="1" actId="47"/>
+        <pc:sldMkLst>
+          <pc:docMk/>
+          <pc:sldMk cId="139738668" sldId="263"/>
+        </pc:sldMkLst>
+      </pc:sldChg>
+      <pc:sldChg chg="modNotesTx">
+        <pc:chgData name="James Pengelly" userId="d269fecd-a8a2-4e5a-93ae-88bdaab21f51" providerId="ADAL" clId="{36A8BE69-29E1-4F13-A49C-C25AE91E6A3E}" dt="2023-09-06T14:32:28.299" v="582"/>
+        <pc:sldMkLst>
+          <pc:docMk/>
+          <pc:sldMk cId="3365779185" sldId="264"/>
+        </pc:sldMkLst>
+      </pc:sldChg>
+      <pc:sldChg chg="modNotesTx">
+        <pc:chgData name="James Pengelly" userId="d269fecd-a8a2-4e5a-93ae-88bdaab21f51" providerId="ADAL" clId="{36A8BE69-29E1-4F13-A49C-C25AE91E6A3E}" dt="2023-09-06T14:51:39.048" v="604"/>
+        <pc:sldMkLst>
+          <pc:docMk/>
+          <pc:sldMk cId="3349349304" sldId="265"/>
+        </pc:sldMkLst>
+      </pc:sldChg>
+      <pc:sldChg chg="modNotesTx">
+        <pc:chgData name="James Pengelly" userId="d269fecd-a8a2-4e5a-93ae-88bdaab21f51" providerId="ADAL" clId="{36A8BE69-29E1-4F13-A49C-C25AE91E6A3E}" dt="2023-09-06T14:50:25.679" v="590"/>
+        <pc:sldMkLst>
+          <pc:docMk/>
+          <pc:sldMk cId="2276233524" sldId="266"/>
+        </pc:sldMkLst>
+      </pc:sldChg>
+      <pc:sldChg chg="del">
+        <pc:chgData name="James Pengelly" userId="d269fecd-a8a2-4e5a-93ae-88bdaab21f51" providerId="ADAL" clId="{36A8BE69-29E1-4F13-A49C-C25AE91E6A3E}" dt="2023-08-24T13:52:53.649" v="1" actId="47"/>
+        <pc:sldMkLst>
+          <pc:docMk/>
+          <pc:sldMk cId="4072486014" sldId="267"/>
+        </pc:sldMkLst>
+      </pc:sldChg>
+      <pc:sldChg chg="del">
+        <pc:chgData name="James Pengelly" userId="d269fecd-a8a2-4e5a-93ae-88bdaab21f51" providerId="ADAL" clId="{36A8BE69-29E1-4F13-A49C-C25AE91E6A3E}" dt="2023-08-24T13:52:53.649" v="1" actId="47"/>
+        <pc:sldMkLst>
+          <pc:docMk/>
+          <pc:sldMk cId="3366417685" sldId="268"/>
+        </pc:sldMkLst>
+      </pc:sldChg>
+      <pc:sldChg chg="del">
+        <pc:chgData name="James Pengelly" userId="d269fecd-a8a2-4e5a-93ae-88bdaab21f51" providerId="ADAL" clId="{36A8BE69-29E1-4F13-A49C-C25AE91E6A3E}" dt="2023-08-24T13:52:53.649" v="1" actId="47"/>
+        <pc:sldMkLst>
+          <pc:docMk/>
+          <pc:sldMk cId="2395513725" sldId="269"/>
+        </pc:sldMkLst>
+      </pc:sldChg>
+      <pc:sldChg chg="del">
+        <pc:chgData name="James Pengelly" userId="d269fecd-a8a2-4e5a-93ae-88bdaab21f51" providerId="ADAL" clId="{36A8BE69-29E1-4F13-A49C-C25AE91E6A3E}" dt="2023-08-24T13:52:53.649" v="1" actId="47"/>
+        <pc:sldMkLst>
+          <pc:docMk/>
+          <pc:sldMk cId="1017836692" sldId="270"/>
+        </pc:sldMkLst>
+      </pc:sldChg>
+      <pc:sldChg chg="del">
+        <pc:chgData name="James Pengelly" userId="d269fecd-a8a2-4e5a-93ae-88bdaab21f51" providerId="ADAL" clId="{36A8BE69-29E1-4F13-A49C-C25AE91E6A3E}" dt="2023-08-24T13:52:53.649" v="1" actId="47"/>
+        <pc:sldMkLst>
+          <pc:docMk/>
+          <pc:sldMk cId="99892872" sldId="271"/>
+        </pc:sldMkLst>
+      </pc:sldChg>
+      <pc:sldChg chg="del">
+        <pc:chgData name="James Pengelly" userId="d269fecd-a8a2-4e5a-93ae-88bdaab21f51" providerId="ADAL" clId="{36A8BE69-29E1-4F13-A49C-C25AE91E6A3E}" dt="2023-08-24T13:52:53.649" v="1" actId="47"/>
+        <pc:sldMkLst>
+          <pc:docMk/>
+          <pc:sldMk cId="769677826" sldId="272"/>
+        </pc:sldMkLst>
+      </pc:sldChg>
+      <pc:sldChg chg="del">
+        <pc:chgData name="James Pengelly" userId="d269fecd-a8a2-4e5a-93ae-88bdaab21f51" providerId="ADAL" clId="{36A8BE69-29E1-4F13-A49C-C25AE91E6A3E}" dt="2023-08-24T13:52:53.649" v="1" actId="47"/>
+        <pc:sldMkLst>
+          <pc:docMk/>
+          <pc:sldMk cId="3325081579" sldId="273"/>
+        </pc:sldMkLst>
+      </pc:sldChg>
+      <pc:sldChg chg="del">
+        <pc:chgData name="James Pengelly" userId="d269fecd-a8a2-4e5a-93ae-88bdaab21f51" providerId="ADAL" clId="{36A8BE69-29E1-4F13-A49C-C25AE91E6A3E}" dt="2023-08-24T13:52:53.649" v="1" actId="47"/>
+        <pc:sldMkLst>
+          <pc:docMk/>
+          <pc:sldMk cId="3724492086" sldId="274"/>
+        </pc:sldMkLst>
+      </pc:sldChg>
+      <pc:sldChg chg="del">
+        <pc:chgData name="James Pengelly" userId="d269fecd-a8a2-4e5a-93ae-88bdaab21f51" providerId="ADAL" clId="{36A8BE69-29E1-4F13-A49C-C25AE91E6A3E}" dt="2023-08-24T13:52:53.649" v="1" actId="47"/>
+        <pc:sldMkLst>
+          <pc:docMk/>
+          <pc:sldMk cId="2041858622" sldId="275"/>
+        </pc:sldMkLst>
+      </pc:sldChg>
+      <pc:sldChg chg="del">
+        <pc:chgData name="James Pengelly" userId="d269fecd-a8a2-4e5a-93ae-88bdaab21f51" providerId="ADAL" clId="{36A8BE69-29E1-4F13-A49C-C25AE91E6A3E}" dt="2023-08-24T13:52:53.649" v="1" actId="47"/>
+        <pc:sldMkLst>
+          <pc:docMk/>
+          <pc:sldMk cId="3089985782" sldId="276"/>
+        </pc:sldMkLst>
+      </pc:sldChg>
+      <pc:sldChg chg="del">
+        <pc:chgData name="James Pengelly" userId="d269fecd-a8a2-4e5a-93ae-88bdaab21f51" providerId="ADAL" clId="{36A8BE69-29E1-4F13-A49C-C25AE91E6A3E}" dt="2023-08-24T13:52:53.649" v="1" actId="47"/>
+        <pc:sldMkLst>
+          <pc:docMk/>
+          <pc:sldMk cId="2059499407" sldId="278"/>
+        </pc:sldMkLst>
+      </pc:sldChg>
+      <pc:sldChg chg="del">
+        <pc:chgData name="James Pengelly" userId="d269fecd-a8a2-4e5a-93ae-88bdaab21f51" providerId="ADAL" clId="{36A8BE69-29E1-4F13-A49C-C25AE91E6A3E}" dt="2023-08-24T13:52:53.649" v="1" actId="47"/>
+        <pc:sldMkLst>
+          <pc:docMk/>
+          <pc:sldMk cId="3039752954" sldId="279"/>
+        </pc:sldMkLst>
+      </pc:sldChg>
+      <pc:sldChg chg="del">
+        <pc:chgData name="James Pengelly" userId="d269fecd-a8a2-4e5a-93ae-88bdaab21f51" providerId="ADAL" clId="{36A8BE69-29E1-4F13-A49C-C25AE91E6A3E}" dt="2023-08-24T13:52:53.649" v="1" actId="47"/>
+        <pc:sldMkLst>
+          <pc:docMk/>
+          <pc:sldMk cId="843237950" sldId="280"/>
+        </pc:sldMkLst>
+      </pc:sldChg>
+      <pc:sldChg chg="del">
+        <pc:chgData name="James Pengelly" userId="d269fecd-a8a2-4e5a-93ae-88bdaab21f51" providerId="ADAL" clId="{36A8BE69-29E1-4F13-A49C-C25AE91E6A3E}" dt="2023-08-24T13:52:53.649" v="1" actId="47"/>
+        <pc:sldMkLst>
+          <pc:docMk/>
+          <pc:sldMk cId="3733370379" sldId="281"/>
+        </pc:sldMkLst>
+      </pc:sldChg>
+      <pc:sldChg chg="del">
+        <pc:chgData name="James Pengelly" userId="d269fecd-a8a2-4e5a-93ae-88bdaab21f51" providerId="ADAL" clId="{36A8BE69-29E1-4F13-A49C-C25AE91E6A3E}" dt="2023-08-24T13:52:53.649" v="1" actId="47"/>
+        <pc:sldMkLst>
+          <pc:docMk/>
+          <pc:sldMk cId="3442409454" sldId="282"/>
+        </pc:sldMkLst>
+      </pc:sldChg>
+      <pc:sldChg chg="del">
+        <pc:chgData name="James Pengelly" userId="d269fecd-a8a2-4e5a-93ae-88bdaab21f51" providerId="ADAL" clId="{36A8BE69-29E1-4F13-A49C-C25AE91E6A3E}" dt="2023-08-24T13:52:53.649" v="1" actId="47"/>
+        <pc:sldMkLst>
+          <pc:docMk/>
+          <pc:sldMk cId="991642544" sldId="283"/>
+        </pc:sldMkLst>
+      </pc:sldChg>
+      <pc:sldChg chg="del">
+        <pc:chgData name="James Pengelly" userId="d269fecd-a8a2-4e5a-93ae-88bdaab21f51" providerId="ADAL" clId="{36A8BE69-29E1-4F13-A49C-C25AE91E6A3E}" dt="2023-08-24T13:52:53.649" v="1" actId="47"/>
+        <pc:sldMkLst>
+          <pc:docMk/>
+          <pc:sldMk cId="3247045521" sldId="284"/>
+        </pc:sldMkLst>
+      </pc:sldChg>
+      <pc:sldChg chg="del">
+        <pc:chgData name="James Pengelly" userId="d269fecd-a8a2-4e5a-93ae-88bdaab21f51" providerId="ADAL" clId="{36A8BE69-29E1-4F13-A49C-C25AE91E6A3E}" dt="2023-08-24T13:52:53.649" v="1" actId="47"/>
+        <pc:sldMkLst>
+          <pc:docMk/>
+          <pc:sldMk cId="3516634555" sldId="285"/>
+        </pc:sldMkLst>
+      </pc:sldChg>
+      <pc:sldChg chg="del">
+        <pc:chgData name="James Pengelly" userId="d269fecd-a8a2-4e5a-93ae-88bdaab21f51" providerId="ADAL" clId="{36A8BE69-29E1-4F13-A49C-C25AE91E6A3E}" dt="2023-08-24T13:52:47.429" v="0" actId="47"/>
+        <pc:sldMkLst>
+          <pc:docMk/>
+          <pc:sldMk cId="1363320255" sldId="286"/>
+        </pc:sldMkLst>
+      </pc:sldChg>
+      <pc:sldChg chg="del">
+        <pc:chgData name="James Pengelly" userId="d269fecd-a8a2-4e5a-93ae-88bdaab21f51" providerId="ADAL" clId="{36A8BE69-29E1-4F13-A49C-C25AE91E6A3E}" dt="2023-08-24T13:52:47.429" v="0" actId="47"/>
+        <pc:sldMkLst>
+          <pc:docMk/>
+          <pc:sldMk cId="2461687384" sldId="287"/>
+        </pc:sldMkLst>
+      </pc:sldChg>
+      <pc:sldChg chg="del">
+        <pc:chgData name="James Pengelly" userId="d269fecd-a8a2-4e5a-93ae-88bdaab21f51" providerId="ADAL" clId="{36A8BE69-29E1-4F13-A49C-C25AE91E6A3E}" dt="2023-08-24T13:52:47.429" v="0" actId="47"/>
+        <pc:sldMkLst>
+          <pc:docMk/>
+          <pc:sldMk cId="3936536747" sldId="288"/>
+        </pc:sldMkLst>
+      </pc:sldChg>
+      <pc:sldChg chg="del">
+        <pc:chgData name="James Pengelly" userId="d269fecd-a8a2-4e5a-93ae-88bdaab21f51" providerId="ADAL" clId="{36A8BE69-29E1-4F13-A49C-C25AE91E6A3E}" dt="2023-08-24T13:52:47.429" v="0" actId="47"/>
+        <pc:sldMkLst>
+          <pc:docMk/>
+          <pc:sldMk cId="3641545773" sldId="289"/>
+        </pc:sldMkLst>
+      </pc:sldChg>
+      <pc:sldChg chg="del">
+        <pc:chgData name="James Pengelly" userId="d269fecd-a8a2-4e5a-93ae-88bdaab21f51" providerId="ADAL" clId="{36A8BE69-29E1-4F13-A49C-C25AE91E6A3E}" dt="2023-08-24T13:52:47.429" v="0" actId="47"/>
+        <pc:sldMkLst>
+          <pc:docMk/>
+          <pc:sldMk cId="221518503" sldId="290"/>
+        </pc:sldMkLst>
+      </pc:sldChg>
+      <pc:sldChg chg="del">
+        <pc:chgData name="James Pengelly" userId="d269fecd-a8a2-4e5a-93ae-88bdaab21f51" providerId="ADAL" clId="{36A8BE69-29E1-4F13-A49C-C25AE91E6A3E}" dt="2023-08-24T13:52:47.429" v="0" actId="47"/>
+        <pc:sldMkLst>
+          <pc:docMk/>
+          <pc:sldMk cId="1003357565" sldId="291"/>
+        </pc:sldMkLst>
+      </pc:sldChg>
+      <pc:sldChg chg="del">
+        <pc:chgData name="James Pengelly" userId="d269fecd-a8a2-4e5a-93ae-88bdaab21f51" providerId="ADAL" clId="{36A8BE69-29E1-4F13-A49C-C25AE91E6A3E}" dt="2023-08-24T13:52:47.429" v="0" actId="47"/>
+        <pc:sldMkLst>
+          <pc:docMk/>
+          <pc:sldMk cId="1713016230" sldId="292"/>
+        </pc:sldMkLst>
+      </pc:sldChg>
+      <pc:sldChg chg="del">
+        <pc:chgData name="James Pengelly" userId="d269fecd-a8a2-4e5a-93ae-88bdaab21f51" providerId="ADAL" clId="{36A8BE69-29E1-4F13-A49C-C25AE91E6A3E}" dt="2023-08-24T13:52:47.429" v="0" actId="47"/>
+        <pc:sldMkLst>
+          <pc:docMk/>
+          <pc:sldMk cId="812696670" sldId="293"/>
+        </pc:sldMkLst>
+      </pc:sldChg>
+      <pc:sldChg chg="del">
+        <pc:chgData name="James Pengelly" userId="d269fecd-a8a2-4e5a-93ae-88bdaab21f51" providerId="ADAL" clId="{36A8BE69-29E1-4F13-A49C-C25AE91E6A3E}" dt="2023-08-24T13:52:47.429" v="0" actId="47"/>
+        <pc:sldMkLst>
+          <pc:docMk/>
+          <pc:sldMk cId="1340576365" sldId="294"/>
+        </pc:sldMkLst>
+      </pc:sldChg>
+      <pc:sldChg chg="del">
+        <pc:chgData name="James Pengelly" userId="d269fecd-a8a2-4e5a-93ae-88bdaab21f51" providerId="ADAL" clId="{36A8BE69-29E1-4F13-A49C-C25AE91E6A3E}" dt="2023-08-24T13:52:47.429" v="0" actId="47"/>
+        <pc:sldMkLst>
+          <pc:docMk/>
+          <pc:sldMk cId="1850288332" sldId="295"/>
+        </pc:sldMkLst>
+      </pc:sldChg>
+      <pc:sldChg chg="modNotesTx">
+        <pc:chgData name="James Pengelly" userId="d269fecd-a8a2-4e5a-93ae-88bdaab21f51" providerId="ADAL" clId="{36A8BE69-29E1-4F13-A49C-C25AE91E6A3E}" dt="2023-09-06T14:32:35.632" v="583"/>
+        <pc:sldMkLst>
+          <pc:docMk/>
+          <pc:sldMk cId="2381183512" sldId="296"/>
+        </pc:sldMkLst>
+      </pc:sldChg>
+      <pc:sldChg chg="modNotesTx">
+        <pc:chgData name="James Pengelly" userId="d269fecd-a8a2-4e5a-93ae-88bdaab21f51" providerId="ADAL" clId="{36A8BE69-29E1-4F13-A49C-C25AE91E6A3E}" dt="2023-09-06T14:32:44.106" v="584"/>
+        <pc:sldMkLst>
+          <pc:docMk/>
+          <pc:sldMk cId="2376504653" sldId="297"/>
+        </pc:sldMkLst>
+      </pc:sldChg>
+      <pc:sldChg chg="modNotesTx">
+        <pc:chgData name="James Pengelly" userId="d269fecd-a8a2-4e5a-93ae-88bdaab21f51" providerId="ADAL" clId="{36A8BE69-29E1-4F13-A49C-C25AE91E6A3E}" dt="2023-09-06T14:49:45.482" v="586"/>
+        <pc:sldMkLst>
+          <pc:docMk/>
+          <pc:sldMk cId="1138553672" sldId="298"/>
+        </pc:sldMkLst>
+      </pc:sldChg>
+      <pc:sldChg chg="modNotesTx">
+        <pc:chgData name="James Pengelly" userId="d269fecd-a8a2-4e5a-93ae-88bdaab21f51" providerId="ADAL" clId="{36A8BE69-29E1-4F13-A49C-C25AE91E6A3E}" dt="2023-09-06T14:49:54.735" v="587"/>
+        <pc:sldMkLst>
+          <pc:docMk/>
+          <pc:sldMk cId="2434760376" sldId="299"/>
+        </pc:sldMkLst>
+      </pc:sldChg>
+      <pc:sldChg chg="modNotesTx">
+        <pc:chgData name="James Pengelly" userId="d269fecd-a8a2-4e5a-93ae-88bdaab21f51" providerId="ADAL" clId="{36A8BE69-29E1-4F13-A49C-C25AE91E6A3E}" dt="2023-09-06T14:50:04.150" v="588"/>
+        <pc:sldMkLst>
+          <pc:docMk/>
+          <pc:sldMk cId="2689101175" sldId="300"/>
+        </pc:sldMkLst>
+      </pc:sldChg>
+      <pc:sldChg chg="modNotesTx">
+        <pc:chgData name="James Pengelly" userId="d269fecd-a8a2-4e5a-93ae-88bdaab21f51" providerId="ADAL" clId="{36A8BE69-29E1-4F13-A49C-C25AE91E6A3E}" dt="2023-09-06T14:50:12.805" v="589"/>
+        <pc:sldMkLst>
+          <pc:docMk/>
+          <pc:sldMk cId="3804762140" sldId="301"/>
+        </pc:sldMkLst>
+      </pc:sldChg>
+      <pc:sldChg chg="modNotesTx">
+        <pc:chgData name="James Pengelly" userId="d269fecd-a8a2-4e5a-93ae-88bdaab21f51" providerId="ADAL" clId="{36A8BE69-29E1-4F13-A49C-C25AE91E6A3E}" dt="2023-09-06T14:50:34.254" v="591"/>
+        <pc:sldMkLst>
+          <pc:docMk/>
+          <pc:sldMk cId="1115052603" sldId="302"/>
+        </pc:sldMkLst>
+      </pc:sldChg>
+      <pc:sldChg chg="modNotesTx">
+        <pc:chgData name="James Pengelly" userId="d269fecd-a8a2-4e5a-93ae-88bdaab21f51" providerId="ADAL" clId="{36A8BE69-29E1-4F13-A49C-C25AE91E6A3E}" dt="2023-09-06T14:51:47.963" v="605"/>
+        <pc:sldMkLst>
+          <pc:docMk/>
+          <pc:sldMk cId="2684385073" sldId="303"/>
+        </pc:sldMkLst>
+      </pc:sldChg>
+      <pc:sldChg chg="modNotesTx">
+        <pc:chgData name="James Pengelly" userId="d269fecd-a8a2-4e5a-93ae-88bdaab21f51" providerId="ADAL" clId="{36A8BE69-29E1-4F13-A49C-C25AE91E6A3E}" dt="2023-09-06T14:52:02.861" v="606"/>
+        <pc:sldMkLst>
+          <pc:docMk/>
+          <pc:sldMk cId="684225142" sldId="306"/>
+        </pc:sldMkLst>
+      </pc:sldChg>
+      <pc:sldChg chg="del">
+        <pc:chgData name="James Pengelly" userId="d269fecd-a8a2-4e5a-93ae-88bdaab21f51" providerId="ADAL" clId="{36A8BE69-29E1-4F13-A49C-C25AE91E6A3E}" dt="2023-08-24T13:52:53.649" v="1" actId="47"/>
+        <pc:sldMkLst>
+          <pc:docMk/>
+          <pc:sldMk cId="2007699143" sldId="309"/>
+        </pc:sldMkLst>
+      </pc:sldChg>
+      <pc:sldChg chg="del">
+        <pc:chgData name="James Pengelly" userId="d269fecd-a8a2-4e5a-93ae-88bdaab21f51" providerId="ADAL" clId="{36A8BE69-29E1-4F13-A49C-C25AE91E6A3E}" dt="2023-08-24T13:52:53.649" v="1" actId="47"/>
+        <pc:sldMkLst>
+          <pc:docMk/>
+          <pc:sldMk cId="4281608181" sldId="310"/>
+        </pc:sldMkLst>
+      </pc:sldChg>
+      <pc:sldChg chg="del">
+        <pc:chgData name="James Pengelly" userId="d269fecd-a8a2-4e5a-93ae-88bdaab21f51" providerId="ADAL" clId="{36A8BE69-29E1-4F13-A49C-C25AE91E6A3E}" dt="2023-08-24T13:52:53.649" v="1" actId="47"/>
+        <pc:sldMkLst>
+          <pc:docMk/>
+          <pc:sldMk cId="1732311369" sldId="311"/>
+        </pc:sldMkLst>
+      </pc:sldChg>
+      <pc:sldChg chg="del">
+        <pc:chgData name="James Pengelly" userId="d269fecd-a8a2-4e5a-93ae-88bdaab21f51" providerId="ADAL" clId="{36A8BE69-29E1-4F13-A49C-C25AE91E6A3E}" dt="2023-08-24T13:52:53.649" v="1" actId="47"/>
+        <pc:sldMkLst>
+          <pc:docMk/>
+          <pc:sldMk cId="706290566" sldId="312"/>
+        </pc:sldMkLst>
+      </pc:sldChg>
+      <pc:sldChg chg="del">
+        <pc:chgData name="James Pengelly" userId="d269fecd-a8a2-4e5a-93ae-88bdaab21f51" providerId="ADAL" clId="{36A8BE69-29E1-4F13-A49C-C25AE91E6A3E}" dt="2023-08-24T13:52:53.649" v="1" actId="47"/>
+        <pc:sldMkLst>
+          <pc:docMk/>
+          <pc:sldMk cId="1050497775" sldId="313"/>
+        </pc:sldMkLst>
+      </pc:sldChg>
+      <pc:sldChg chg="del">
+        <pc:chgData name="James Pengelly" userId="d269fecd-a8a2-4e5a-93ae-88bdaab21f51" providerId="ADAL" clId="{36A8BE69-29E1-4F13-A49C-C25AE91E6A3E}" dt="2023-08-24T13:52:53.649" v="1" actId="47"/>
+        <pc:sldMkLst>
+          <pc:docMk/>
+          <pc:sldMk cId="302017435" sldId="314"/>
+        </pc:sldMkLst>
+      </pc:sldChg>
+      <pc:sldChg chg="del">
+        <pc:chgData name="James Pengelly" userId="d269fecd-a8a2-4e5a-93ae-88bdaab21f51" providerId="ADAL" clId="{36A8BE69-29E1-4F13-A49C-C25AE91E6A3E}" dt="2023-08-24T13:52:53.649" v="1" actId="47"/>
+        <pc:sldMkLst>
+          <pc:docMk/>
+          <pc:sldMk cId="3206953828" sldId="315"/>
+        </pc:sldMkLst>
+      </pc:sldChg>
+      <pc:sldChg chg="del">
+        <pc:chgData name="James Pengelly" userId="d269fecd-a8a2-4e5a-93ae-88bdaab21f51" providerId="ADAL" clId="{36A8BE69-29E1-4F13-A49C-C25AE91E6A3E}" dt="2023-08-24T13:52:53.649" v="1" actId="47"/>
+        <pc:sldMkLst>
+          <pc:docMk/>
+          <pc:sldMk cId="461759407" sldId="316"/>
+        </pc:sldMkLst>
+      </pc:sldChg>
+      <pc:sldChg chg="modNotesTx">
+        <pc:chgData name="James Pengelly" userId="d269fecd-a8a2-4e5a-93ae-88bdaab21f51" providerId="ADAL" clId="{36A8BE69-29E1-4F13-A49C-C25AE91E6A3E}" dt="2023-09-06T14:49:36.391" v="585"/>
+        <pc:sldMkLst>
+          <pc:docMk/>
+          <pc:sldMk cId="1296373743" sldId="318"/>
+        </pc:sldMkLst>
+      </pc:sldChg>
+      <pc:sldChg chg="modNotesTx">
+        <pc:chgData name="James Pengelly" userId="d269fecd-a8a2-4e5a-93ae-88bdaab21f51" providerId="ADAL" clId="{36A8BE69-29E1-4F13-A49C-C25AE91E6A3E}" dt="2023-09-06T14:52:12.662" v="607"/>
+        <pc:sldMkLst>
+          <pc:docMk/>
+          <pc:sldMk cId="744962618" sldId="319"/>
+        </pc:sldMkLst>
+      </pc:sldChg>
+      <pc:sldChg chg="modNotesTx">
+        <pc:chgData name="James Pengelly" userId="d269fecd-a8a2-4e5a-93ae-88bdaab21f51" providerId="ADAL" clId="{36A8BE69-29E1-4F13-A49C-C25AE91E6A3E}" dt="2023-09-06T14:51:10.755" v="602"/>
+        <pc:sldMkLst>
+          <pc:docMk/>
+          <pc:sldMk cId="1610607834" sldId="320"/>
+        </pc:sldMkLst>
+      </pc:sldChg>
+      <pc:sldChg chg="modNotesTx">
+        <pc:chgData name="James Pengelly" userId="d269fecd-a8a2-4e5a-93ae-88bdaab21f51" providerId="ADAL" clId="{36A8BE69-29E1-4F13-A49C-C25AE91E6A3E}" dt="2023-09-06T14:51:20.193" v="603"/>
+        <pc:sldMkLst>
+          <pc:docMk/>
+          <pc:sldMk cId="3963402502" sldId="321"/>
+        </pc:sldMkLst>
+      </pc:sldChg>
+      <pc:sldChg chg="modNotesTx">
+        <pc:chgData name="James Pengelly" userId="d269fecd-a8a2-4e5a-93ae-88bdaab21f51" providerId="ADAL" clId="{36A8BE69-29E1-4F13-A49C-C25AE91E6A3E}" dt="2023-09-06T14:50:59.379" v="601"/>
+        <pc:sldMkLst>
+          <pc:docMk/>
+          <pc:sldMk cId="3505850654" sldId="322"/>
+        </pc:sldMkLst>
+      </pc:sldChg>
+      <pc:sldChg chg="modSp mod modNotesTx">
+        <pc:chgData name="James Pengelly" userId="d269fecd-a8a2-4e5a-93ae-88bdaab21f51" providerId="ADAL" clId="{36A8BE69-29E1-4F13-A49C-C25AE91E6A3E}" dt="2023-09-06T14:50:50.675" v="600" actId="20577"/>
+        <pc:sldMkLst>
+          <pc:docMk/>
+          <pc:sldMk cId="3804464651" sldId="323"/>
+        </pc:sldMkLst>
+        <pc:spChg chg="mod">
+          <ac:chgData name="James Pengelly" userId="d269fecd-a8a2-4e5a-93ae-88bdaab21f51" providerId="ADAL" clId="{36A8BE69-29E1-4F13-A49C-C25AE91E6A3E}" dt="2023-09-06T14:50:50.675" v="600" actId="20577"/>
+          <ac:spMkLst>
+            <pc:docMk/>
+            <pc:sldMk cId="3804464651" sldId="323"/>
+            <ac:spMk id="2" creationId="{266F7C0E-DAD9-713E-0331-E09D69640ED5}"/>
+          </ac:spMkLst>
+        </pc:spChg>
+      </pc:sldChg>
+      <pc:sldChg chg="del">
+        <pc:chgData name="James Pengelly" userId="d269fecd-a8a2-4e5a-93ae-88bdaab21f51" providerId="ADAL" clId="{36A8BE69-29E1-4F13-A49C-C25AE91E6A3E}" dt="2023-08-24T13:52:53.649" v="1" actId="47"/>
+        <pc:sldMkLst>
+          <pc:docMk/>
+          <pc:sldMk cId="3978815442" sldId="325"/>
+        </pc:sldMkLst>
+      </pc:sldChg>
+      <pc:sldChg chg="del">
+        <pc:chgData name="James Pengelly" userId="d269fecd-a8a2-4e5a-93ae-88bdaab21f51" providerId="ADAL" clId="{36A8BE69-29E1-4F13-A49C-C25AE91E6A3E}" dt="2023-08-24T13:52:53.649" v="1" actId="47"/>
+        <pc:sldMkLst>
+          <pc:docMk/>
+          <pc:sldMk cId="4128920781" sldId="326"/>
+        </pc:sldMkLst>
+      </pc:sldChg>
+      <pc:sldChg chg="del">
+        <pc:chgData name="James Pengelly" userId="d269fecd-a8a2-4e5a-93ae-88bdaab21f51" providerId="ADAL" clId="{36A8BE69-29E1-4F13-A49C-C25AE91E6A3E}" dt="2023-08-24T13:52:53.649" v="1" actId="47"/>
+        <pc:sldMkLst>
+          <pc:docMk/>
+          <pc:sldMk cId="3609049697" sldId="328"/>
+        </pc:sldMkLst>
+      </pc:sldChg>
+      <pc:sldChg chg="del">
+        <pc:chgData name="James Pengelly" userId="d269fecd-a8a2-4e5a-93ae-88bdaab21f51" providerId="ADAL" clId="{36A8BE69-29E1-4F13-A49C-C25AE91E6A3E}" dt="2023-08-24T13:52:53.649" v="1" actId="47"/>
+        <pc:sldMkLst>
+          <pc:docMk/>
+          <pc:sldMk cId="4044510429" sldId="329"/>
+        </pc:sldMkLst>
+      </pc:sldChg>
+      <pc:sldChg chg="del">
+        <pc:chgData name="James Pengelly" userId="d269fecd-a8a2-4e5a-93ae-88bdaab21f51" providerId="ADAL" clId="{36A8BE69-29E1-4F13-A49C-C25AE91E6A3E}" dt="2023-08-24T13:52:53.649" v="1" actId="47"/>
+        <pc:sldMkLst>
+          <pc:docMk/>
+          <pc:sldMk cId="3719625191" sldId="330"/>
+        </pc:sldMkLst>
+      </pc:sldChg>
+      <pc:sldChg chg="del">
+        <pc:chgData name="James Pengelly" userId="d269fecd-a8a2-4e5a-93ae-88bdaab21f51" providerId="ADAL" clId="{36A8BE69-29E1-4F13-A49C-C25AE91E6A3E}" dt="2023-08-24T13:52:53.649" v="1" actId="47"/>
+        <pc:sldMkLst>
+          <pc:docMk/>
+          <pc:sldMk cId="2040865147" sldId="332"/>
+        </pc:sldMkLst>
+      </pc:sldChg>
+      <pc:sldChg chg="del">
+        <pc:chgData name="James Pengelly" userId="d269fecd-a8a2-4e5a-93ae-88bdaab21f51" providerId="ADAL" clId="{36A8BE69-29E1-4F13-A49C-C25AE91E6A3E}" dt="2023-08-24T13:52:53.649" v="1" actId="47"/>
+        <pc:sldMkLst>
+          <pc:docMk/>
+          <pc:sldMk cId="388135180" sldId="335"/>
+        </pc:sldMkLst>
+      </pc:sldChg>
+      <pc:sldChg chg="del">
+        <pc:chgData name="James Pengelly" userId="d269fecd-a8a2-4e5a-93ae-88bdaab21f51" providerId="ADAL" clId="{36A8BE69-29E1-4F13-A49C-C25AE91E6A3E}" dt="2023-08-24T13:52:53.649" v="1" actId="47"/>
+        <pc:sldMkLst>
+          <pc:docMk/>
+          <pc:sldMk cId="53542421" sldId="336"/>
+        </pc:sldMkLst>
+      </pc:sldChg>
+      <pc:sldChg chg="del">
+        <pc:chgData name="James Pengelly" userId="d269fecd-a8a2-4e5a-93ae-88bdaab21f51" providerId="ADAL" clId="{36A8BE69-29E1-4F13-A49C-C25AE91E6A3E}" dt="2023-08-24T13:52:53.649" v="1" actId="47"/>
+        <pc:sldMkLst>
+          <pc:docMk/>
+          <pc:sldMk cId="83370898" sldId="337"/>
+        </pc:sldMkLst>
+      </pc:sldChg>
+      <pc:sldChg chg="del">
+        <pc:chgData name="James Pengelly" userId="d269fecd-a8a2-4e5a-93ae-88bdaab21f51" providerId="ADAL" clId="{36A8BE69-29E1-4F13-A49C-C25AE91E6A3E}" dt="2023-08-24T13:52:53.649" v="1" actId="47"/>
+        <pc:sldMkLst>
+          <pc:docMk/>
+          <pc:sldMk cId="616534455" sldId="339"/>
+        </pc:sldMkLst>
+      </pc:sldChg>
+      <pc:sldChg chg="del">
+        <pc:chgData name="James Pengelly" userId="d269fecd-a8a2-4e5a-93ae-88bdaab21f51" providerId="ADAL" clId="{36A8BE69-29E1-4F13-A49C-C25AE91E6A3E}" dt="2023-08-24T13:52:53.649" v="1" actId="47"/>
+        <pc:sldMkLst>
+          <pc:docMk/>
+          <pc:sldMk cId="4278748134" sldId="340"/>
+        </pc:sldMkLst>
+      </pc:sldChg>
+      <pc:sldChg chg="del">
+        <pc:chgData name="James Pengelly" userId="d269fecd-a8a2-4e5a-93ae-88bdaab21f51" providerId="ADAL" clId="{36A8BE69-29E1-4F13-A49C-C25AE91E6A3E}" dt="2023-08-24T13:52:53.649" v="1" actId="47"/>
+        <pc:sldMkLst>
+          <pc:docMk/>
+          <pc:sldMk cId="1240060841" sldId="341"/>
+        </pc:sldMkLst>
+      </pc:sldChg>
+      <pc:sldChg chg="del">
+        <pc:chgData name="James Pengelly" userId="d269fecd-a8a2-4e5a-93ae-88bdaab21f51" providerId="ADAL" clId="{36A8BE69-29E1-4F13-A49C-C25AE91E6A3E}" dt="2023-08-24T13:52:53.649" v="1" actId="47"/>
+        <pc:sldMkLst>
+          <pc:docMk/>
+          <pc:sldMk cId="4101100443" sldId="342"/>
+        </pc:sldMkLst>
+      </pc:sldChg>
+      <pc:sldChg chg="del">
+        <pc:chgData name="James Pengelly" userId="d269fecd-a8a2-4e5a-93ae-88bdaab21f51" providerId="ADAL" clId="{36A8BE69-29E1-4F13-A49C-C25AE91E6A3E}" dt="2023-08-24T13:52:53.649" v="1" actId="47"/>
+        <pc:sldMkLst>
+          <pc:docMk/>
+          <pc:sldMk cId="3008721888" sldId="344"/>
+        </pc:sldMkLst>
+      </pc:sldChg>
+      <pc:sldChg chg="del">
+        <pc:chgData name="James Pengelly" userId="d269fecd-a8a2-4e5a-93ae-88bdaab21f51" providerId="ADAL" clId="{36A8BE69-29E1-4F13-A49C-C25AE91E6A3E}" dt="2023-08-24T13:52:53.649" v="1" actId="47"/>
+        <pc:sldMkLst>
+          <pc:docMk/>
+          <pc:sldMk cId="2498661059" sldId="348"/>
+        </pc:sldMkLst>
+      </pc:sldChg>
+      <pc:sldChg chg="del">
+        <pc:chgData name="James Pengelly" userId="d269fecd-a8a2-4e5a-93ae-88bdaab21f51" providerId="ADAL" clId="{36A8BE69-29E1-4F13-A49C-C25AE91E6A3E}" dt="2023-08-24T13:52:53.649" v="1" actId="47"/>
+        <pc:sldMkLst>
+          <pc:docMk/>
+          <pc:sldMk cId="3173009956" sldId="349"/>
+        </pc:sldMkLst>
+      </pc:sldChg>
+      <pc:sldChg chg="del">
+        <pc:chgData name="James Pengelly" userId="d269fecd-a8a2-4e5a-93ae-88bdaab21f51" providerId="ADAL" clId="{36A8BE69-29E1-4F13-A49C-C25AE91E6A3E}" dt="2023-08-24T13:52:53.649" v="1" actId="47"/>
+        <pc:sldMkLst>
+          <pc:docMk/>
+          <pc:sldMk cId="1492353232" sldId="351"/>
+        </pc:sldMkLst>
+      </pc:sldChg>
+      <pc:sldChg chg="del">
+        <pc:chgData name="James Pengelly" userId="d269fecd-a8a2-4e5a-93ae-88bdaab21f51" providerId="ADAL" clId="{36A8BE69-29E1-4F13-A49C-C25AE91E6A3E}" dt="2023-08-24T13:52:53.649" v="1" actId="47"/>
+        <pc:sldMkLst>
+          <pc:docMk/>
+          <pc:sldMk cId="1033267871" sldId="353"/>
+        </pc:sldMkLst>
+      </pc:sldChg>
+      <pc:sldChg chg="del">
+        <pc:chgData name="James Pengelly" userId="d269fecd-a8a2-4e5a-93ae-88bdaab21f51" providerId="ADAL" clId="{36A8BE69-29E1-4F13-A49C-C25AE91E6A3E}" dt="2023-08-24T13:52:53.649" v="1" actId="47"/>
+        <pc:sldMkLst>
+          <pc:docMk/>
+          <pc:sldMk cId="2628053539" sldId="354"/>
+        </pc:sldMkLst>
+      </pc:sldChg>
+      <pc:sldChg chg="del">
+        <pc:chgData name="James Pengelly" userId="d269fecd-a8a2-4e5a-93ae-88bdaab21f51" providerId="ADAL" clId="{36A8BE69-29E1-4F13-A49C-C25AE91E6A3E}" dt="2023-08-24T13:52:53.649" v="1" actId="47"/>
+        <pc:sldMkLst>
+          <pc:docMk/>
+          <pc:sldMk cId="4050608242" sldId="355"/>
+        </pc:sldMkLst>
+      </pc:sldChg>
+      <pc:sldChg chg="del">
+        <pc:chgData name="James Pengelly" userId="d269fecd-a8a2-4e5a-93ae-88bdaab21f51" providerId="ADAL" clId="{36A8BE69-29E1-4F13-A49C-C25AE91E6A3E}" dt="2023-08-24T13:52:53.649" v="1" actId="47"/>
+        <pc:sldMkLst>
+          <pc:docMk/>
+          <pc:sldMk cId="916358898" sldId="357"/>
+        </pc:sldMkLst>
+      </pc:sldChg>
+      <pc:sldChg chg="del">
+        <pc:chgData name="James Pengelly" userId="d269fecd-a8a2-4e5a-93ae-88bdaab21f51" providerId="ADAL" clId="{36A8BE69-29E1-4F13-A49C-C25AE91E6A3E}" dt="2023-08-24T13:52:53.649" v="1" actId="47"/>
+        <pc:sldMkLst>
+          <pc:docMk/>
+          <pc:sldMk cId="2672439797" sldId="359"/>
+        </pc:sldMkLst>
+      </pc:sldChg>
+      <pc:sldChg chg="del">
+        <pc:chgData name="James Pengelly" userId="d269fecd-a8a2-4e5a-93ae-88bdaab21f51" providerId="ADAL" clId="{36A8BE69-29E1-4F13-A49C-C25AE91E6A3E}" dt="2023-08-24T13:52:53.649" v="1" actId="47"/>
+        <pc:sldMkLst>
+          <pc:docMk/>
+          <pc:sldMk cId="2827498227" sldId="361"/>
+        </pc:sldMkLst>
+      </pc:sldChg>
+      <pc:sldChg chg="del">
+        <pc:chgData name="James Pengelly" userId="d269fecd-a8a2-4e5a-93ae-88bdaab21f51" providerId="ADAL" clId="{36A8BE69-29E1-4F13-A49C-C25AE91E6A3E}" dt="2023-08-24T13:52:53.649" v="1" actId="47"/>
+        <pc:sldMkLst>
+          <pc:docMk/>
+          <pc:sldMk cId="1572451248" sldId="362"/>
+        </pc:sldMkLst>
+      </pc:sldChg>
+      <pc:sldChg chg="del">
+        <pc:chgData name="James Pengelly" userId="d269fecd-a8a2-4e5a-93ae-88bdaab21f51" providerId="ADAL" clId="{36A8BE69-29E1-4F13-A49C-C25AE91E6A3E}" dt="2023-08-24T13:52:53.649" v="1" actId="47"/>
+        <pc:sldMkLst>
+          <pc:docMk/>
+          <pc:sldMk cId="1291327909" sldId="363"/>
+        </pc:sldMkLst>
+      </pc:sldChg>
+      <pc:sldChg chg="del">
+        <pc:chgData name="James Pengelly" userId="d269fecd-a8a2-4e5a-93ae-88bdaab21f51" providerId="ADAL" clId="{36A8BE69-29E1-4F13-A49C-C25AE91E6A3E}" dt="2023-08-24T13:52:53.649" v="1" actId="47"/>
+        <pc:sldMkLst>
+          <pc:docMk/>
+          <pc:sldMk cId="1201177167" sldId="364"/>
+        </pc:sldMkLst>
+      </pc:sldChg>
+      <pc:sldChg chg="del">
+        <pc:chgData name="James Pengelly" userId="d269fecd-a8a2-4e5a-93ae-88bdaab21f51" providerId="ADAL" clId="{36A8BE69-29E1-4F13-A49C-C25AE91E6A3E}" dt="2023-08-24T13:52:53.649" v="1" actId="47"/>
+        <pc:sldMkLst>
+          <pc:docMk/>
+          <pc:sldMk cId="2289605612" sldId="368"/>
+        </pc:sldMkLst>
+      </pc:sldChg>
+      <pc:sldChg chg="del">
+        <pc:chgData name="James Pengelly" userId="d269fecd-a8a2-4e5a-93ae-88bdaab21f51" providerId="ADAL" clId="{36A8BE69-29E1-4F13-A49C-C25AE91E6A3E}" dt="2023-08-24T13:52:53.649" v="1" actId="47"/>
+        <pc:sldMkLst>
+          <pc:docMk/>
+          <pc:sldMk cId="1501366186" sldId="369"/>
+        </pc:sldMkLst>
+      </pc:sldChg>
+      <pc:sldChg chg="del">
+        <pc:chgData name="James Pengelly" userId="d269fecd-a8a2-4e5a-93ae-88bdaab21f51" providerId="ADAL" clId="{36A8BE69-29E1-4F13-A49C-C25AE91E6A3E}" dt="2023-08-24T13:52:53.649" v="1" actId="47"/>
+        <pc:sldMkLst>
+          <pc:docMk/>
+          <pc:sldMk cId="1148689023" sldId="371"/>
+        </pc:sldMkLst>
+      </pc:sldChg>
+      <pc:sldChg chg="del">
+        <pc:chgData name="James Pengelly" userId="d269fecd-a8a2-4e5a-93ae-88bdaab21f51" providerId="ADAL" clId="{36A8BE69-29E1-4F13-A49C-C25AE91E6A3E}" dt="2023-08-24T13:52:53.649" v="1" actId="47"/>
+        <pc:sldMkLst>
+          <pc:docMk/>
+          <pc:sldMk cId="3907955957" sldId="374"/>
+        </pc:sldMkLst>
+      </pc:sldChg>
+      <pc:sldChg chg="del">
+        <pc:chgData name="James Pengelly" userId="d269fecd-a8a2-4e5a-93ae-88bdaab21f51" providerId="ADAL" clId="{36A8BE69-29E1-4F13-A49C-C25AE91E6A3E}" dt="2023-08-24T13:52:53.649" v="1" actId="47"/>
+        <pc:sldMkLst>
+          <pc:docMk/>
+          <pc:sldMk cId="109215933" sldId="377"/>
+        </pc:sldMkLst>
+      </pc:sldChg>
+      <pc:sldChg chg="del">
+        <pc:chgData name="James Pengelly" userId="d269fecd-a8a2-4e5a-93ae-88bdaab21f51" providerId="ADAL" clId="{36A8BE69-29E1-4F13-A49C-C25AE91E6A3E}" dt="2023-08-24T13:52:53.649" v="1" actId="47"/>
+        <pc:sldMkLst>
+          <pc:docMk/>
+          <pc:sldMk cId="3890781229" sldId="379"/>
+        </pc:sldMkLst>
+      </pc:sldChg>
+      <pc:sldChg chg="del">
+        <pc:chgData name="James Pengelly" userId="d269fecd-a8a2-4e5a-93ae-88bdaab21f51" providerId="ADAL" clId="{36A8BE69-29E1-4F13-A49C-C25AE91E6A3E}" dt="2023-08-24T13:52:53.649" v="1" actId="47"/>
+        <pc:sldMkLst>
+          <pc:docMk/>
+          <pc:sldMk cId="282604571" sldId="380"/>
+        </pc:sldMkLst>
+      </pc:sldChg>
+      <pc:sldChg chg="del">
+        <pc:chgData name="James Pengelly" userId="d269fecd-a8a2-4e5a-93ae-88bdaab21f51" providerId="ADAL" clId="{36A8BE69-29E1-4F13-A49C-C25AE91E6A3E}" dt="2023-08-24T13:52:53.649" v="1" actId="47"/>
+        <pc:sldMkLst>
+          <pc:docMk/>
+          <pc:sldMk cId="428784610" sldId="383"/>
+        </pc:sldMkLst>
+      </pc:sldChg>
+      <pc:sldChg chg="del">
+        <pc:chgData name="James Pengelly" userId="d269fecd-a8a2-4e5a-93ae-88bdaab21f51" providerId="ADAL" clId="{36A8BE69-29E1-4F13-A49C-C25AE91E6A3E}" dt="2023-08-24T13:52:53.649" v="1" actId="47"/>
+        <pc:sldMkLst>
+          <pc:docMk/>
+          <pc:sldMk cId="1010180652" sldId="384"/>
+        </pc:sldMkLst>
+      </pc:sldChg>
+      <pc:sldChg chg="del">
+        <pc:chgData name="James Pengelly" userId="d269fecd-a8a2-4e5a-93ae-88bdaab21f51" providerId="ADAL" clId="{36A8BE69-29E1-4F13-A49C-C25AE91E6A3E}" dt="2023-08-24T13:52:53.649" v="1" actId="47"/>
+        <pc:sldMkLst>
+          <pc:docMk/>
+          <pc:sldMk cId="993561127" sldId="385"/>
+        </pc:sldMkLst>
+      </pc:sldChg>
+      <pc:sldChg chg="del">
+        <pc:chgData name="James Pengelly" userId="d269fecd-a8a2-4e5a-93ae-88bdaab21f51" providerId="ADAL" clId="{36A8BE69-29E1-4F13-A49C-C25AE91E6A3E}" dt="2023-08-24T13:52:53.649" v="1" actId="47"/>
+        <pc:sldMkLst>
+          <pc:docMk/>
+          <pc:sldMk cId="1665857579" sldId="390"/>
+        </pc:sldMkLst>
+      </pc:sldChg>
+      <pc:sldChg chg="del">
+        <pc:chgData name="James Pengelly" userId="d269fecd-a8a2-4e5a-93ae-88bdaab21f51" providerId="ADAL" clId="{36A8BE69-29E1-4F13-A49C-C25AE91E6A3E}" dt="2023-08-24T13:52:53.649" v="1" actId="47"/>
+        <pc:sldMkLst>
+          <pc:docMk/>
+          <pc:sldMk cId="2824444913" sldId="393"/>
+        </pc:sldMkLst>
+      </pc:sldChg>
+      <pc:sldChg chg="del">
+        <pc:chgData name="James Pengelly" userId="d269fecd-a8a2-4e5a-93ae-88bdaab21f51" providerId="ADAL" clId="{36A8BE69-29E1-4F13-A49C-C25AE91E6A3E}" dt="2023-08-24T13:52:53.649" v="1" actId="47"/>
+        <pc:sldMkLst>
+          <pc:docMk/>
+          <pc:sldMk cId="1829934662" sldId="394"/>
+        </pc:sldMkLst>
+      </pc:sldChg>
+      <pc:sldChg chg="del">
+        <pc:chgData name="James Pengelly" userId="d269fecd-a8a2-4e5a-93ae-88bdaab21f51" providerId="ADAL" clId="{36A8BE69-29E1-4F13-A49C-C25AE91E6A3E}" dt="2023-08-24T13:52:53.649" v="1" actId="47"/>
+        <pc:sldMkLst>
+          <pc:docMk/>
+          <pc:sldMk cId="1339298764" sldId="395"/>
+        </pc:sldMkLst>
+      </pc:sldChg>
+      <pc:sldChg chg="del">
+        <pc:chgData name="James Pengelly" userId="d269fecd-a8a2-4e5a-93ae-88bdaab21f51" providerId="ADAL" clId="{36A8BE69-29E1-4F13-A49C-C25AE91E6A3E}" dt="2023-08-24T13:52:53.649" v="1" actId="47"/>
+        <pc:sldMkLst>
+          <pc:docMk/>
+          <pc:sldMk cId="1016084178" sldId="396"/>
+        </pc:sldMkLst>
+      </pc:sldChg>
+      <pc:sldChg chg="del">
+        <pc:chgData name="James Pengelly" userId="d269fecd-a8a2-4e5a-93ae-88bdaab21f51" providerId="ADAL" clId="{36A8BE69-29E1-4F13-A49C-C25AE91E6A3E}" dt="2023-08-24T13:52:53.649" v="1" actId="47"/>
+        <pc:sldMkLst>
+          <pc:docMk/>
+          <pc:sldMk cId="4214344726" sldId="397"/>
+        </pc:sldMkLst>
+      </pc:sldChg>
+      <pc:sldChg chg="del">
+        <pc:chgData name="James Pengelly" userId="d269fecd-a8a2-4e5a-93ae-88bdaab21f51" providerId="ADAL" clId="{36A8BE69-29E1-4F13-A49C-C25AE91E6A3E}" dt="2023-08-24T13:52:53.649" v="1" actId="47"/>
+        <pc:sldMkLst>
+          <pc:docMk/>
+          <pc:sldMk cId="3450668804" sldId="398"/>
+        </pc:sldMkLst>
+      </pc:sldChg>
+      <pc:sldChg chg="del">
+        <pc:chgData name="James Pengelly" userId="d269fecd-a8a2-4e5a-93ae-88bdaab21f51" providerId="ADAL" clId="{36A8BE69-29E1-4F13-A49C-C25AE91E6A3E}" dt="2023-08-24T13:52:53.649" v="1" actId="47"/>
+        <pc:sldMkLst>
+          <pc:docMk/>
+          <pc:sldMk cId="2762218996" sldId="399"/>
+        </pc:sldMkLst>
+      </pc:sldChg>
+      <pc:sldChg chg="del">
+        <pc:chgData name="James Pengelly" userId="d269fecd-a8a2-4e5a-93ae-88bdaab21f51" providerId="ADAL" clId="{36A8BE69-29E1-4F13-A49C-C25AE91E6A3E}" dt="2023-08-24T13:52:53.649" v="1" actId="47"/>
+        <pc:sldMkLst>
+          <pc:docMk/>
+          <pc:sldMk cId="2590891385" sldId="400"/>
+        </pc:sldMkLst>
+      </pc:sldChg>
+      <pc:sldChg chg="del">
+        <pc:chgData name="James Pengelly" userId="d269fecd-a8a2-4e5a-93ae-88bdaab21f51" providerId="ADAL" clId="{36A8BE69-29E1-4F13-A49C-C25AE91E6A3E}" dt="2023-08-24T13:52:53.649" v="1" actId="47"/>
+        <pc:sldMkLst>
+          <pc:docMk/>
+          <pc:sldMk cId="3953387796" sldId="401"/>
+        </pc:sldMkLst>
+      </pc:sldChg>
+      <pc:sldChg chg="del">
+        <pc:chgData name="James Pengelly" userId="d269fecd-a8a2-4e5a-93ae-88bdaab21f51" providerId="ADAL" clId="{36A8BE69-29E1-4F13-A49C-C25AE91E6A3E}" dt="2023-08-24T13:52:53.649" v="1" actId="47"/>
+        <pc:sldMkLst>
+          <pc:docMk/>
+          <pc:sldMk cId="2727043731" sldId="402"/>
+        </pc:sldMkLst>
+      </pc:sldChg>
+      <pc:sldChg chg="del">
+        <pc:chgData name="James Pengelly" userId="d269fecd-a8a2-4e5a-93ae-88bdaab21f51" providerId="ADAL" clId="{36A8BE69-29E1-4F13-A49C-C25AE91E6A3E}" dt="2023-08-24T13:52:53.649" v="1" actId="47"/>
+        <pc:sldMkLst>
+          <pc:docMk/>
+          <pc:sldMk cId="3781024619" sldId="403"/>
+        </pc:sldMkLst>
+      </pc:sldChg>
+      <pc:sldChg chg="del">
+        <pc:chgData name="James Pengelly" userId="d269fecd-a8a2-4e5a-93ae-88bdaab21f51" providerId="ADAL" clId="{36A8BE69-29E1-4F13-A49C-C25AE91E6A3E}" dt="2023-08-24T13:52:53.649" v="1" actId="47"/>
+        <pc:sldMkLst>
+          <pc:docMk/>
+          <pc:sldMk cId="76376853" sldId="404"/>
+        </pc:sldMkLst>
+      </pc:sldChg>
+      <pc:sldChg chg="del">
+        <pc:chgData name="James Pengelly" userId="d269fecd-a8a2-4e5a-93ae-88bdaab21f51" providerId="ADAL" clId="{36A8BE69-29E1-4F13-A49C-C25AE91E6A3E}" dt="2023-08-24T13:52:53.649" v="1" actId="47"/>
+        <pc:sldMkLst>
+          <pc:docMk/>
+          <pc:sldMk cId="3447527312" sldId="405"/>
+        </pc:sldMkLst>
+      </pc:sldChg>
+      <pc:sldChg chg="del">
+        <pc:chgData name="James Pengelly" userId="d269fecd-a8a2-4e5a-93ae-88bdaab21f51" providerId="ADAL" clId="{36A8BE69-29E1-4F13-A49C-C25AE91E6A3E}" dt="2023-08-24T13:52:53.649" v="1" actId="47"/>
+        <pc:sldMkLst>
+          <pc:docMk/>
+          <pc:sldMk cId="3461596423" sldId="406"/>
+        </pc:sldMkLst>
+      </pc:sldChg>
+      <pc:sldChg chg="del">
+        <pc:chgData name="James Pengelly" userId="d269fecd-a8a2-4e5a-93ae-88bdaab21f51" providerId="ADAL" clId="{36A8BE69-29E1-4F13-A49C-C25AE91E6A3E}" dt="2023-08-24T13:52:53.649" v="1" actId="47"/>
+        <pc:sldMkLst>
+          <pc:docMk/>
+          <pc:sldMk cId="4273903402" sldId="408"/>
+        </pc:sldMkLst>
+      </pc:sldChg>
+      <pc:sldChg chg="del">
+        <pc:chgData name="James Pengelly" userId="d269fecd-a8a2-4e5a-93ae-88bdaab21f51" providerId="ADAL" clId="{36A8BE69-29E1-4F13-A49C-C25AE91E6A3E}" dt="2023-08-24T13:52:53.649" v="1" actId="47"/>
+        <pc:sldMkLst>
+          <pc:docMk/>
+          <pc:sldMk cId="1848990747" sldId="409"/>
+        </pc:sldMkLst>
+      </pc:sldChg>
+      <pc:sldChg chg="del">
+        <pc:chgData name="James Pengelly" userId="d269fecd-a8a2-4e5a-93ae-88bdaab21f51" providerId="ADAL" clId="{36A8BE69-29E1-4F13-A49C-C25AE91E6A3E}" dt="2023-08-24T13:52:53.649" v="1" actId="47"/>
+        <pc:sldMkLst>
+          <pc:docMk/>
+          <pc:sldMk cId="1126499771" sldId="411"/>
+        </pc:sldMkLst>
+      </pc:sldChg>
+      <pc:sldChg chg="del">
+        <pc:chgData name="James Pengelly" userId="d269fecd-a8a2-4e5a-93ae-88bdaab21f51" providerId="ADAL" clId="{36A8BE69-29E1-4F13-A49C-C25AE91E6A3E}" dt="2023-08-24T13:52:53.649" v="1" actId="47"/>
+        <pc:sldMkLst>
+          <pc:docMk/>
+          <pc:sldMk cId="2212437411" sldId="412"/>
+        </pc:sldMkLst>
+      </pc:sldChg>
+      <pc:sldChg chg="del">
+        <pc:chgData name="James Pengelly" userId="d269fecd-a8a2-4e5a-93ae-88bdaab21f51" providerId="ADAL" clId="{36A8BE69-29E1-4F13-A49C-C25AE91E6A3E}" dt="2023-08-24T13:52:53.649" v="1" actId="47"/>
+        <pc:sldMkLst>
+          <pc:docMk/>
+          <pc:sldMk cId="2156432247" sldId="413"/>
+        </pc:sldMkLst>
+      </pc:sldChg>
+      <pc:sldChg chg="del">
+        <pc:chgData name="James Pengelly" userId="d269fecd-a8a2-4e5a-93ae-88bdaab21f51" providerId="ADAL" clId="{36A8BE69-29E1-4F13-A49C-C25AE91E6A3E}" dt="2023-08-24T13:52:53.649" v="1" actId="47"/>
+        <pc:sldMkLst>
+          <pc:docMk/>
+          <pc:sldMk cId="263362339" sldId="415"/>
+        </pc:sldMkLst>
+      </pc:sldChg>
+      <pc:sldChg chg="del">
+        <pc:chgData name="James Pengelly" userId="d269fecd-a8a2-4e5a-93ae-88bdaab21f51" providerId="ADAL" clId="{36A8BE69-29E1-4F13-A49C-C25AE91E6A3E}" dt="2023-08-24T13:52:53.649" v="1" actId="47"/>
+        <pc:sldMkLst>
+          <pc:docMk/>
+          <pc:sldMk cId="519644668" sldId="418"/>
+        </pc:sldMkLst>
+      </pc:sldChg>
+      <pc:sldChg chg="del">
+        <pc:chgData name="James Pengelly" userId="d269fecd-a8a2-4e5a-93ae-88bdaab21f51" providerId="ADAL" clId="{36A8BE69-29E1-4F13-A49C-C25AE91E6A3E}" dt="2023-08-24T13:52:53.649" v="1" actId="47"/>
+        <pc:sldMkLst>
+          <pc:docMk/>
+          <pc:sldMk cId="3631135714" sldId="419"/>
+        </pc:sldMkLst>
+      </pc:sldChg>
+      <pc:sldChg chg="del">
+        <pc:chgData name="James Pengelly" userId="d269fecd-a8a2-4e5a-93ae-88bdaab21f51" providerId="ADAL" clId="{36A8BE69-29E1-4F13-A49C-C25AE91E6A3E}" dt="2023-08-24T13:52:53.649" v="1" actId="47"/>
+        <pc:sldMkLst>
+          <pc:docMk/>
+          <pc:sldMk cId="2961224881" sldId="420"/>
+        </pc:sldMkLst>
+      </pc:sldChg>
+      <pc:sldChg chg="del">
+        <pc:chgData name="James Pengelly" userId="d269fecd-a8a2-4e5a-93ae-88bdaab21f51" providerId="ADAL" clId="{36A8BE69-29E1-4F13-A49C-C25AE91E6A3E}" dt="2023-08-24T13:52:53.649" v="1" actId="47"/>
+        <pc:sldMkLst>
+          <pc:docMk/>
+          <pc:sldMk cId="1221700180" sldId="421"/>
+        </pc:sldMkLst>
+      </pc:sldChg>
+      <pc:sldChg chg="del">
+        <pc:chgData name="James Pengelly" userId="d269fecd-a8a2-4e5a-93ae-88bdaab21f51" providerId="ADAL" clId="{36A8BE69-29E1-4F13-A49C-C25AE91E6A3E}" dt="2023-08-24T13:52:53.649" v="1" actId="47"/>
+        <pc:sldMkLst>
+          <pc:docMk/>
+          <pc:sldMk cId="747938625" sldId="422"/>
+        </pc:sldMkLst>
+      </pc:sldChg>
+      <pc:sldChg chg="del">
+        <pc:chgData name="James Pengelly" userId="d269fecd-a8a2-4e5a-93ae-88bdaab21f51" providerId="ADAL" clId="{36A8BE69-29E1-4F13-A49C-C25AE91E6A3E}" dt="2023-08-24T13:52:53.649" v="1" actId="47"/>
+        <pc:sldMkLst>
+          <pc:docMk/>
+          <pc:sldMk cId="3663672702" sldId="423"/>
+        </pc:sldMkLst>
+      </pc:sldChg>
+      <pc:sldChg chg="del">
+        <pc:chgData name="James Pengelly" userId="d269fecd-a8a2-4e5a-93ae-88bdaab21f51" providerId="ADAL" clId="{36A8BE69-29E1-4F13-A49C-C25AE91E6A3E}" dt="2023-08-24T13:52:53.649" v="1" actId="47"/>
+        <pc:sldMkLst>
+          <pc:docMk/>
+          <pc:sldMk cId="1703881002" sldId="424"/>
+        </pc:sldMkLst>
+      </pc:sldChg>
+      <pc:sldChg chg="del">
+        <pc:chgData name="James Pengelly" userId="d269fecd-a8a2-4e5a-93ae-88bdaab21f51" providerId="ADAL" clId="{36A8BE69-29E1-4F13-A49C-C25AE91E6A3E}" dt="2023-08-24T13:52:53.649" v="1" actId="47"/>
+        <pc:sldMkLst>
+          <pc:docMk/>
+          <pc:sldMk cId="2422481433" sldId="426"/>
+        </pc:sldMkLst>
+      </pc:sldChg>
+      <pc:sldChg chg="del">
+        <pc:chgData name="James Pengelly" userId="d269fecd-a8a2-4e5a-93ae-88bdaab21f51" providerId="ADAL" clId="{36A8BE69-29E1-4F13-A49C-C25AE91E6A3E}" dt="2023-08-24T13:52:53.649" v="1" actId="47"/>
+        <pc:sldMkLst>
+          <pc:docMk/>
+          <pc:sldMk cId="1349580473" sldId="429"/>
+        </pc:sldMkLst>
+      </pc:sldChg>
+      <pc:sldChg chg="del">
+        <pc:chgData name="James Pengelly" userId="d269fecd-a8a2-4e5a-93ae-88bdaab21f51" providerId="ADAL" clId="{36A8BE69-29E1-4F13-A49C-C25AE91E6A3E}" dt="2023-08-24T13:52:53.649" v="1" actId="47"/>
+        <pc:sldMkLst>
+          <pc:docMk/>
+          <pc:sldMk cId="2265083478" sldId="430"/>
+        </pc:sldMkLst>
+      </pc:sldChg>
+      <pc:sldChg chg="del">
+        <pc:chgData name="James Pengelly" userId="d269fecd-a8a2-4e5a-93ae-88bdaab21f51" providerId="ADAL" clId="{36A8BE69-29E1-4F13-A49C-C25AE91E6A3E}" dt="2023-08-24T13:52:53.649" v="1" actId="47"/>
+        <pc:sldMkLst>
+          <pc:docMk/>
+          <pc:sldMk cId="2863113325" sldId="431"/>
+        </pc:sldMkLst>
+      </pc:sldChg>
+      <pc:sldChg chg="del">
+        <pc:chgData name="James Pengelly" userId="d269fecd-a8a2-4e5a-93ae-88bdaab21f51" providerId="ADAL" clId="{36A8BE69-29E1-4F13-A49C-C25AE91E6A3E}" dt="2023-08-24T13:52:53.649" v="1" actId="47"/>
+        <pc:sldMkLst>
+          <pc:docMk/>
+          <pc:sldMk cId="3556797560" sldId="432"/>
+        </pc:sldMkLst>
+      </pc:sldChg>
+      <pc:sldChg chg="del">
+        <pc:chgData name="James Pengelly" userId="d269fecd-a8a2-4e5a-93ae-88bdaab21f51" providerId="ADAL" clId="{36A8BE69-29E1-4F13-A49C-C25AE91E6A3E}" dt="2023-08-24T13:52:53.649" v="1" actId="47"/>
+        <pc:sldMkLst>
+          <pc:docMk/>
+          <pc:sldMk cId="2981302178" sldId="433"/>
+        </pc:sldMkLst>
+      </pc:sldChg>
+      <pc:sldChg chg="del">
+        <pc:chgData name="James Pengelly" userId="d269fecd-a8a2-4e5a-93ae-88bdaab21f51" providerId="ADAL" clId="{36A8BE69-29E1-4F13-A49C-C25AE91E6A3E}" dt="2023-08-24T13:52:53.649" v="1" actId="47"/>
+        <pc:sldMkLst>
+          <pc:docMk/>
+          <pc:sldMk cId="733584931" sldId="434"/>
+        </pc:sldMkLst>
+      </pc:sldChg>
+      <pc:sldChg chg="del">
+        <pc:chgData name="James Pengelly" userId="d269fecd-a8a2-4e5a-93ae-88bdaab21f51" providerId="ADAL" clId="{36A8BE69-29E1-4F13-A49C-C25AE91E6A3E}" dt="2023-08-24T13:52:53.649" v="1" actId="47"/>
+        <pc:sldMkLst>
+          <pc:docMk/>
+          <pc:sldMk cId="1695507307" sldId="435"/>
+        </pc:sldMkLst>
+      </pc:sldChg>
+      <pc:sldChg chg="del">
+        <pc:chgData name="James Pengelly" userId="d269fecd-a8a2-4e5a-93ae-88bdaab21f51" providerId="ADAL" clId="{36A8BE69-29E1-4F13-A49C-C25AE91E6A3E}" dt="2023-08-24T13:52:53.649" v="1" actId="47"/>
+        <pc:sldMkLst>
+          <pc:docMk/>
+          <pc:sldMk cId="2233051909" sldId="436"/>
+        </pc:sldMkLst>
+      </pc:sldChg>
+      <pc:sldChg chg="del">
+        <pc:chgData name="James Pengelly" userId="d269fecd-a8a2-4e5a-93ae-88bdaab21f51" providerId="ADAL" clId="{36A8BE69-29E1-4F13-A49C-C25AE91E6A3E}" dt="2023-08-24T13:52:53.649" v="1" actId="47"/>
+        <pc:sldMkLst>
+          <pc:docMk/>
+          <pc:sldMk cId="1342897180" sldId="437"/>
+        </pc:sldMkLst>
+      </pc:sldChg>
+      <pc:sldChg chg="del">
+        <pc:chgData name="James Pengelly" userId="d269fecd-a8a2-4e5a-93ae-88bdaab21f51" providerId="ADAL" clId="{36A8BE69-29E1-4F13-A49C-C25AE91E6A3E}" dt="2023-08-24T13:52:53.649" v="1" actId="47"/>
+        <pc:sldMkLst>
+          <pc:docMk/>
+          <pc:sldMk cId="3580490817" sldId="438"/>
+        </pc:sldMkLst>
+      </pc:sldChg>
+      <pc:sldChg chg="del">
+        <pc:chgData name="James Pengelly" userId="d269fecd-a8a2-4e5a-93ae-88bdaab21f51" providerId="ADAL" clId="{36A8BE69-29E1-4F13-A49C-C25AE91E6A3E}" dt="2023-08-24T13:52:53.649" v="1" actId="47"/>
+        <pc:sldMkLst>
+          <pc:docMk/>
+          <pc:sldMk cId="3852504957" sldId="439"/>
+        </pc:sldMkLst>
+      </pc:sldChg>
+      <pc:sldChg chg="del">
+        <pc:chgData name="James Pengelly" userId="d269fecd-a8a2-4e5a-93ae-88bdaab21f51" providerId="ADAL" clId="{36A8BE69-29E1-4F13-A49C-C25AE91E6A3E}" dt="2023-08-24T13:52:53.649" v="1" actId="47"/>
+        <pc:sldMkLst>
+          <pc:docMk/>
+          <pc:sldMk cId="3380087145" sldId="440"/>
+        </pc:sldMkLst>
+      </pc:sldChg>
+      <pc:sldChg chg="del">
+        <pc:chgData name="James Pengelly" userId="d269fecd-a8a2-4e5a-93ae-88bdaab21f51" providerId="ADAL" clId="{36A8BE69-29E1-4F13-A49C-C25AE91E6A3E}" dt="2023-08-24T13:52:53.649" v="1" actId="47"/>
+        <pc:sldMkLst>
+          <pc:docMk/>
+          <pc:sldMk cId="698315745" sldId="441"/>
+        </pc:sldMkLst>
+      </pc:sldChg>
+      <pc:sldChg chg="del">
+        <pc:chgData name="James Pengelly" userId="d269fecd-a8a2-4e5a-93ae-88bdaab21f51" providerId="ADAL" clId="{36A8BE69-29E1-4F13-A49C-C25AE91E6A3E}" dt="2023-08-24T13:52:53.649" v="1" actId="47"/>
+        <pc:sldMkLst>
+          <pc:docMk/>
+          <pc:sldMk cId="3816258168" sldId="442"/>
+        </pc:sldMkLst>
+      </pc:sldChg>
+      <pc:sldChg chg="del">
+        <pc:chgData name="James Pengelly" userId="d269fecd-a8a2-4e5a-93ae-88bdaab21f51" providerId="ADAL" clId="{36A8BE69-29E1-4F13-A49C-C25AE91E6A3E}" dt="2023-08-24T13:52:53.649" v="1" actId="47"/>
+        <pc:sldMkLst>
+          <pc:docMk/>
+          <pc:sldMk cId="1753989791" sldId="444"/>
+        </pc:sldMkLst>
+      </pc:sldChg>
+      <pc:sldChg chg="del">
+        <pc:chgData name="James Pengelly" userId="d269fecd-a8a2-4e5a-93ae-88bdaab21f51" providerId="ADAL" clId="{36A8BE69-29E1-4F13-A49C-C25AE91E6A3E}" dt="2023-08-24T13:52:53.649" v="1" actId="47"/>
+        <pc:sldMkLst>
+          <pc:docMk/>
+          <pc:sldMk cId="1660465454" sldId="445"/>
+        </pc:sldMkLst>
+      </pc:sldChg>
+      <pc:sldChg chg="del">
+        <pc:chgData name="James Pengelly" userId="d269fecd-a8a2-4e5a-93ae-88bdaab21f51" providerId="ADAL" clId="{36A8BE69-29E1-4F13-A49C-C25AE91E6A3E}" dt="2023-08-24T13:52:53.649" v="1" actId="47"/>
+        <pc:sldMkLst>
+          <pc:docMk/>
+          <pc:sldMk cId="565982352" sldId="447"/>
+        </pc:sldMkLst>
+      </pc:sldChg>
+      <pc:sldChg chg="del">
+        <pc:chgData name="James Pengelly" userId="d269fecd-a8a2-4e5a-93ae-88bdaab21f51" providerId="ADAL" clId="{36A8BE69-29E1-4F13-A49C-C25AE91E6A3E}" dt="2023-08-24T13:52:53.649" v="1" actId="47"/>
+        <pc:sldMkLst>
+          <pc:docMk/>
+          <pc:sldMk cId="1357474779" sldId="448"/>
+        </pc:sldMkLst>
+      </pc:sldChg>
+      <pc:sldChg chg="del">
+        <pc:chgData name="James Pengelly" userId="d269fecd-a8a2-4e5a-93ae-88bdaab21f51" providerId="ADAL" clId="{36A8BE69-29E1-4F13-A49C-C25AE91E6A3E}" dt="2023-08-24T13:52:53.649" v="1" actId="47"/>
+        <pc:sldMkLst>
+          <pc:docMk/>
+          <pc:sldMk cId="2067507612" sldId="449"/>
+        </pc:sldMkLst>
+      </pc:sldChg>
+      <pc:sldChg chg="del">
+        <pc:chgData name="James Pengelly" userId="d269fecd-a8a2-4e5a-93ae-88bdaab21f51" providerId="ADAL" clId="{36A8BE69-29E1-4F13-A49C-C25AE91E6A3E}" dt="2023-08-24T13:52:53.649" v="1" actId="47"/>
+        <pc:sldMkLst>
+          <pc:docMk/>
+          <pc:sldMk cId="2390412907" sldId="450"/>
+        </pc:sldMkLst>
+      </pc:sldChg>
+      <pc:sldChg chg="del">
+        <pc:chgData name="James Pengelly" userId="d269fecd-a8a2-4e5a-93ae-88bdaab21f51" providerId="ADAL" clId="{36A8BE69-29E1-4F13-A49C-C25AE91E6A3E}" dt="2023-08-24T13:52:53.649" v="1" actId="47"/>
+        <pc:sldMkLst>
+          <pc:docMk/>
+          <pc:sldMk cId="2183265962" sldId="451"/>
+        </pc:sldMkLst>
+      </pc:sldChg>
+      <pc:sldChg chg="del">
+        <pc:chgData name="James Pengelly" userId="d269fecd-a8a2-4e5a-93ae-88bdaab21f51" providerId="ADAL" clId="{36A8BE69-29E1-4F13-A49C-C25AE91E6A3E}" dt="2023-08-24T13:52:53.649" v="1" actId="47"/>
+        <pc:sldMkLst>
+          <pc:docMk/>
+          <pc:sldMk cId="2783724496" sldId="452"/>
+        </pc:sldMkLst>
+      </pc:sldChg>
+      <pc:sldChg chg="del">
+        <pc:chgData name="James Pengelly" userId="d269fecd-a8a2-4e5a-93ae-88bdaab21f51" providerId="ADAL" clId="{36A8BE69-29E1-4F13-A49C-C25AE91E6A3E}" dt="2023-08-24T13:52:53.649" v="1" actId="47"/>
+        <pc:sldMkLst>
+          <pc:docMk/>
+          <pc:sldMk cId="2334895818" sldId="453"/>
+        </pc:sldMkLst>
+      </pc:sldChg>
+      <pc:sldChg chg="del">
+        <pc:chgData name="James Pengelly" userId="d269fecd-a8a2-4e5a-93ae-88bdaab21f51" providerId="ADAL" clId="{36A8BE69-29E1-4F13-A49C-C25AE91E6A3E}" dt="2023-08-24T13:52:53.649" v="1" actId="47"/>
+        <pc:sldMkLst>
+          <pc:docMk/>
+          <pc:sldMk cId="1506105089" sldId="454"/>
+        </pc:sldMkLst>
+      </pc:sldChg>
+      <pc:sldChg chg="del">
+        <pc:chgData name="James Pengelly" userId="d269fecd-a8a2-4e5a-93ae-88bdaab21f51" providerId="ADAL" clId="{36A8BE69-29E1-4F13-A49C-C25AE91E6A3E}" dt="2023-08-24T13:52:53.649" v="1" actId="47"/>
+        <pc:sldMkLst>
+          <pc:docMk/>
+          <pc:sldMk cId="1780367112" sldId="455"/>
+        </pc:sldMkLst>
+      </pc:sldChg>
+      <pc:sldChg chg="del">
+        <pc:chgData name="James Pengelly" userId="d269fecd-a8a2-4e5a-93ae-88bdaab21f51" providerId="ADAL" clId="{36A8BE69-29E1-4F13-A49C-C25AE91E6A3E}" dt="2023-08-24T13:52:53.649" v="1" actId="47"/>
+        <pc:sldMkLst>
+          <pc:docMk/>
+          <pc:sldMk cId="2878365943" sldId="461"/>
+        </pc:sldMkLst>
+      </pc:sldChg>
+      <pc:sldChg chg="del">
+        <pc:chgData name="James Pengelly" userId="d269fecd-a8a2-4e5a-93ae-88bdaab21f51" providerId="ADAL" clId="{36A8BE69-29E1-4F13-A49C-C25AE91E6A3E}" dt="2023-08-24T13:52:53.649" v="1" actId="47"/>
+        <pc:sldMkLst>
+          <pc:docMk/>
+          <pc:sldMk cId="1809496739" sldId="463"/>
+        </pc:sldMkLst>
+      </pc:sldChg>
+      <pc:sldChg chg="del">
+        <pc:chgData name="James Pengelly" userId="d269fecd-a8a2-4e5a-93ae-88bdaab21f51" providerId="ADAL" clId="{36A8BE69-29E1-4F13-A49C-C25AE91E6A3E}" dt="2023-08-24T13:52:53.649" v="1" actId="47"/>
+        <pc:sldMkLst>
+          <pc:docMk/>
+          <pc:sldMk cId="3183680570" sldId="464"/>
+        </pc:sldMkLst>
+      </pc:sldChg>
+      <pc:sldChg chg="del">
+        <pc:chgData name="James Pengelly" userId="d269fecd-a8a2-4e5a-93ae-88bdaab21f51" providerId="ADAL" clId="{36A8BE69-29E1-4F13-A49C-C25AE91E6A3E}" dt="2023-08-24T13:52:53.649" v="1" actId="47"/>
+        <pc:sldMkLst>
+          <pc:docMk/>
+          <pc:sldMk cId="3408326376" sldId="465"/>
+        </pc:sldMkLst>
+      </pc:sldChg>
+      <pc:sldChg chg="del">
+        <pc:chgData name="James Pengelly" userId="d269fecd-a8a2-4e5a-93ae-88bdaab21f51" providerId="ADAL" clId="{36A8BE69-29E1-4F13-A49C-C25AE91E6A3E}" dt="2023-08-24T13:52:53.649" v="1" actId="47"/>
+        <pc:sldMkLst>
+          <pc:docMk/>
+          <pc:sldMk cId="3761177557" sldId="468"/>
+        </pc:sldMkLst>
+      </pc:sldChg>
+      <pc:sldChg chg="del">
+        <pc:chgData name="James Pengelly" userId="d269fecd-a8a2-4e5a-93ae-88bdaab21f51" providerId="ADAL" clId="{36A8BE69-29E1-4F13-A49C-C25AE91E6A3E}" dt="2023-08-24T13:52:53.649" v="1" actId="47"/>
+        <pc:sldMkLst>
+          <pc:docMk/>
+          <pc:sldMk cId="1450753478" sldId="469"/>
+        </pc:sldMkLst>
+      </pc:sldChg>
+      <pc:sldChg chg="del">
+        <pc:chgData name="James Pengelly" userId="d269fecd-a8a2-4e5a-93ae-88bdaab21f51" providerId="ADAL" clId="{36A8BE69-29E1-4F13-A49C-C25AE91E6A3E}" dt="2023-08-24T13:52:53.649" v="1" actId="47"/>
+        <pc:sldMkLst>
+          <pc:docMk/>
+          <pc:sldMk cId="597277254" sldId="470"/>
+        </pc:sldMkLst>
+      </pc:sldChg>
+      <pc:sldChg chg="del">
+        <pc:chgData name="James Pengelly" userId="d269fecd-a8a2-4e5a-93ae-88bdaab21f51" providerId="ADAL" clId="{36A8BE69-29E1-4F13-A49C-C25AE91E6A3E}" dt="2023-08-24T13:52:53.649" v="1" actId="47"/>
+        <pc:sldMkLst>
+          <pc:docMk/>
+          <pc:sldMk cId="3444267560" sldId="471"/>
+        </pc:sldMkLst>
+      </pc:sldChg>
+      <pc:sldChg chg="del">
+        <pc:chgData name="James Pengelly" userId="d269fecd-a8a2-4e5a-93ae-88bdaab21f51" providerId="ADAL" clId="{36A8BE69-29E1-4F13-A49C-C25AE91E6A3E}" dt="2023-08-24T13:52:53.649" v="1" actId="47"/>
+        <pc:sldMkLst>
+          <pc:docMk/>
+          <pc:sldMk cId="177810587" sldId="472"/>
+        </pc:sldMkLst>
+      </pc:sldChg>
+      <pc:sldChg chg="del">
+        <pc:chgData name="James Pengelly" userId="d269fecd-a8a2-4e5a-93ae-88bdaab21f51" providerId="ADAL" clId="{36A8BE69-29E1-4F13-A49C-C25AE91E6A3E}" dt="2023-08-24T13:52:53.649" v="1" actId="47"/>
+        <pc:sldMkLst>
+          <pc:docMk/>
+          <pc:sldMk cId="3928027250" sldId="473"/>
+        </pc:sldMkLst>
+      </pc:sldChg>
+      <pc:sldChg chg="del">
+        <pc:chgData name="James Pengelly" userId="d269fecd-a8a2-4e5a-93ae-88bdaab21f51" providerId="ADAL" clId="{36A8BE69-29E1-4F13-A49C-C25AE91E6A3E}" dt="2023-08-24T13:52:53.649" v="1" actId="47"/>
+        <pc:sldMkLst>
+          <pc:docMk/>
+          <pc:sldMk cId="1208367764" sldId="474"/>
+        </pc:sldMkLst>
+      </pc:sldChg>
+      <pc:sldChg chg="del">
+        <pc:chgData name="James Pengelly" userId="d269fecd-a8a2-4e5a-93ae-88bdaab21f51" providerId="ADAL" clId="{36A8BE69-29E1-4F13-A49C-C25AE91E6A3E}" dt="2023-08-24T13:52:53.649" v="1" actId="47"/>
+        <pc:sldMkLst>
+          <pc:docMk/>
+          <pc:sldMk cId="1846318869" sldId="475"/>
+        </pc:sldMkLst>
+      </pc:sldChg>
+      <pc:sldChg chg="del">
+        <pc:chgData name="James Pengelly" userId="d269fecd-a8a2-4e5a-93ae-88bdaab21f51" providerId="ADAL" clId="{36A8BE69-29E1-4F13-A49C-C25AE91E6A3E}" dt="2023-08-24T13:52:53.649" v="1" actId="47"/>
+        <pc:sldMkLst>
+          <pc:docMk/>
+          <pc:sldMk cId="1050364708" sldId="476"/>
+        </pc:sldMkLst>
+      </pc:sldChg>
+      <pc:sldChg chg="del">
+        <pc:chgData name="James Pengelly" userId="d269fecd-a8a2-4e5a-93ae-88bdaab21f51" providerId="ADAL" clId="{36A8BE69-29E1-4F13-A49C-C25AE91E6A3E}" dt="2023-08-24T13:52:53.649" v="1" actId="47"/>
+        <pc:sldMkLst>
+          <pc:docMk/>
+          <pc:sldMk cId="1189368309" sldId="477"/>
+        </pc:sldMkLst>
+      </pc:sldChg>
+      <pc:sldChg chg="del">
+        <pc:chgData name="James Pengelly" userId="d269fecd-a8a2-4e5a-93ae-88bdaab21f51" providerId="ADAL" clId="{36A8BE69-29E1-4F13-A49C-C25AE91E6A3E}" dt="2023-08-24T13:52:53.649" v="1" actId="47"/>
+        <pc:sldMkLst>
+          <pc:docMk/>
+          <pc:sldMk cId="3022556364" sldId="478"/>
+        </pc:sldMkLst>
+      </pc:sldChg>
+      <pc:sldChg chg="del">
+        <pc:chgData name="James Pengelly" userId="d269fecd-a8a2-4e5a-93ae-88bdaab21f51" providerId="ADAL" clId="{36A8BE69-29E1-4F13-A49C-C25AE91E6A3E}" dt="2023-08-24T13:52:53.649" v="1" actId="47"/>
+        <pc:sldMkLst>
+          <pc:docMk/>
+          <pc:sldMk cId="3131689005" sldId="523"/>
+        </pc:sldMkLst>
+      </pc:sldChg>
+      <pc:sldChg chg="del">
+        <pc:chgData name="James Pengelly" userId="d269fecd-a8a2-4e5a-93ae-88bdaab21f51" providerId="ADAL" clId="{36A8BE69-29E1-4F13-A49C-C25AE91E6A3E}" dt="2023-08-24T13:52:53.649" v="1" actId="47"/>
+        <pc:sldMkLst>
+          <pc:docMk/>
+          <pc:sldMk cId="2811473902" sldId="564"/>
+        </pc:sldMkLst>
+      </pc:sldChg>
+      <pc:sldChg chg="del">
+        <pc:chgData name="James Pengelly" userId="d269fecd-a8a2-4e5a-93ae-88bdaab21f51" providerId="ADAL" clId="{36A8BE69-29E1-4F13-A49C-C25AE91E6A3E}" dt="2023-08-24T13:52:53.649" v="1" actId="47"/>
+        <pc:sldMkLst>
+          <pc:docMk/>
+          <pc:sldMk cId="396875299" sldId="620"/>
+        </pc:sldMkLst>
+      </pc:sldChg>
+      <pc:sldChg chg="del">
+        <pc:chgData name="James Pengelly" userId="d269fecd-a8a2-4e5a-93ae-88bdaab21f51" providerId="ADAL" clId="{36A8BE69-29E1-4F13-A49C-C25AE91E6A3E}" dt="2023-08-24T13:52:53.649" v="1" actId="47"/>
+        <pc:sldMkLst>
+          <pc:docMk/>
+          <pc:sldMk cId="3049657586" sldId="915"/>
+        </pc:sldMkLst>
+      </pc:sldChg>
+      <pc:sldChg chg="del">
+        <pc:chgData name="James Pengelly" userId="d269fecd-a8a2-4e5a-93ae-88bdaab21f51" providerId="ADAL" clId="{36A8BE69-29E1-4F13-A49C-C25AE91E6A3E}" dt="2023-08-24T13:52:53.649" v="1" actId="47"/>
+        <pc:sldMkLst>
+          <pc:docMk/>
+          <pc:sldMk cId="1551599212" sldId="916"/>
+        </pc:sldMkLst>
+      </pc:sldChg>
+      <pc:sldChg chg="del">
+        <pc:chgData name="James Pengelly" userId="d269fecd-a8a2-4e5a-93ae-88bdaab21f51" providerId="ADAL" clId="{36A8BE69-29E1-4F13-A49C-C25AE91E6A3E}" dt="2023-08-24T13:52:53.649" v="1" actId="47"/>
+        <pc:sldMkLst>
+          <pc:docMk/>
+          <pc:sldMk cId="2931648276" sldId="917"/>
+        </pc:sldMkLst>
+      </pc:sldChg>
+      <pc:sldChg chg="del">
+        <pc:chgData name="James Pengelly" userId="d269fecd-a8a2-4e5a-93ae-88bdaab21f51" providerId="ADAL" clId="{36A8BE69-29E1-4F13-A49C-C25AE91E6A3E}" dt="2023-08-24T13:52:53.649" v="1" actId="47"/>
+        <pc:sldMkLst>
+          <pc:docMk/>
+          <pc:sldMk cId="3463918722" sldId="918"/>
+        </pc:sldMkLst>
+      </pc:sldChg>
+      <pc:sldChg chg="del">
+        <pc:chgData name="James Pengelly" userId="d269fecd-a8a2-4e5a-93ae-88bdaab21f51" providerId="ADAL" clId="{36A8BE69-29E1-4F13-A49C-C25AE91E6A3E}" dt="2023-08-24T13:52:53.649" v="1" actId="47"/>
+        <pc:sldMkLst>
+          <pc:docMk/>
+          <pc:sldMk cId="1855871270" sldId="919"/>
+        </pc:sldMkLst>
+      </pc:sldChg>
+      <pc:sldChg chg="del">
+        <pc:chgData name="James Pengelly" userId="d269fecd-a8a2-4e5a-93ae-88bdaab21f51" providerId="ADAL" clId="{36A8BE69-29E1-4F13-A49C-C25AE91E6A3E}" dt="2023-08-24T13:52:53.649" v="1" actId="47"/>
+        <pc:sldMkLst>
+          <pc:docMk/>
+          <pc:sldMk cId="564391330" sldId="920"/>
+        </pc:sldMkLst>
+      </pc:sldChg>
+      <pc:sldChg chg="del">
+        <pc:chgData name="James Pengelly" userId="d269fecd-a8a2-4e5a-93ae-88bdaab21f51" providerId="ADAL" clId="{36A8BE69-29E1-4F13-A49C-C25AE91E6A3E}" dt="2023-08-24T13:52:53.649" v="1" actId="47"/>
+        <pc:sldMkLst>
+          <pc:docMk/>
+          <pc:sldMk cId="2984159356" sldId="921"/>
+        </pc:sldMkLst>
+      </pc:sldChg>
+      <pc:sldChg chg="del">
+        <pc:chgData name="James Pengelly" userId="d269fecd-a8a2-4e5a-93ae-88bdaab21f51" providerId="ADAL" clId="{36A8BE69-29E1-4F13-A49C-C25AE91E6A3E}" dt="2023-08-24T13:52:53.649" v="1" actId="47"/>
+        <pc:sldMkLst>
+          <pc:docMk/>
+          <pc:sldMk cId="3406951735" sldId="922"/>
+        </pc:sldMkLst>
+      </pc:sldChg>
+      <pc:sldChg chg="del">
+        <pc:chgData name="James Pengelly" userId="d269fecd-a8a2-4e5a-93ae-88bdaab21f51" providerId="ADAL" clId="{36A8BE69-29E1-4F13-A49C-C25AE91E6A3E}" dt="2023-08-24T13:52:53.649" v="1" actId="47"/>
+        <pc:sldMkLst>
+          <pc:docMk/>
+          <pc:sldMk cId="2607486583" sldId="923"/>
+        </pc:sldMkLst>
+      </pc:sldChg>
+      <pc:sldChg chg="del">
+        <pc:chgData name="James Pengelly" userId="d269fecd-a8a2-4e5a-93ae-88bdaab21f51" providerId="ADAL" clId="{36A8BE69-29E1-4F13-A49C-C25AE91E6A3E}" dt="2023-08-24T13:52:53.649" v="1" actId="47"/>
+        <pc:sldMkLst>
+          <pc:docMk/>
+          <pc:sldMk cId="4092808222" sldId="924"/>
+        </pc:sldMkLst>
+      </pc:sldChg>
+      <pc:sldChg chg="del">
+        <pc:chgData name="James Pengelly" userId="d269fecd-a8a2-4e5a-93ae-88bdaab21f51" providerId="ADAL" clId="{36A8BE69-29E1-4F13-A49C-C25AE91E6A3E}" dt="2023-08-24T13:52:53.649" v="1" actId="47"/>
+        <pc:sldMkLst>
+          <pc:docMk/>
+          <pc:sldMk cId="2193365181" sldId="925"/>
+        </pc:sldMkLst>
+      </pc:sldChg>
+      <pc:sldChg chg="del">
+        <pc:chgData name="James Pengelly" userId="d269fecd-a8a2-4e5a-93ae-88bdaab21f51" providerId="ADAL" clId="{36A8BE69-29E1-4F13-A49C-C25AE91E6A3E}" dt="2023-08-24T13:52:53.649" v="1" actId="47"/>
+        <pc:sldMkLst>
+          <pc:docMk/>
+          <pc:sldMk cId="4138720517" sldId="926"/>
+        </pc:sldMkLst>
+      </pc:sldChg>
+      <pc:sldChg chg="del">
+        <pc:chgData name="James Pengelly" userId="d269fecd-a8a2-4e5a-93ae-88bdaab21f51" providerId="ADAL" clId="{36A8BE69-29E1-4F13-A49C-C25AE91E6A3E}" dt="2023-08-24T13:52:53.649" v="1" actId="47"/>
+        <pc:sldMkLst>
+          <pc:docMk/>
+          <pc:sldMk cId="858939526" sldId="927"/>
+        </pc:sldMkLst>
+      </pc:sldChg>
+      <pc:sldChg chg="del">
+        <pc:chgData name="James Pengelly" userId="d269fecd-a8a2-4e5a-93ae-88bdaab21f51" providerId="ADAL" clId="{36A8BE69-29E1-4F13-A49C-C25AE91E6A3E}" dt="2023-08-24T13:52:53.649" v="1" actId="47"/>
+        <pc:sldMkLst>
+          <pc:docMk/>
+          <pc:sldMk cId="566436964" sldId="928"/>
+        </pc:sldMkLst>
+      </pc:sldChg>
+      <pc:sldChg chg="del">
+        <pc:chgData name="James Pengelly" userId="d269fecd-a8a2-4e5a-93ae-88bdaab21f51" providerId="ADAL" clId="{36A8BE69-29E1-4F13-A49C-C25AE91E6A3E}" dt="2023-08-24T13:52:53.649" v="1" actId="47"/>
+        <pc:sldMkLst>
+          <pc:docMk/>
+          <pc:sldMk cId="2713682525" sldId="929"/>
+        </pc:sldMkLst>
+      </pc:sldChg>
+      <pc:sldChg chg="del">
+        <pc:chgData name="James Pengelly" userId="d269fecd-a8a2-4e5a-93ae-88bdaab21f51" providerId="ADAL" clId="{36A8BE69-29E1-4F13-A49C-C25AE91E6A3E}" dt="2023-08-24T13:52:53.649" v="1" actId="47"/>
+        <pc:sldMkLst>
+          <pc:docMk/>
+          <pc:sldMk cId="885992107" sldId="930"/>
+        </pc:sldMkLst>
+      </pc:sldChg>
+      <pc:sldChg chg="del">
+        <pc:chgData name="James Pengelly" userId="d269fecd-a8a2-4e5a-93ae-88bdaab21f51" providerId="ADAL" clId="{36A8BE69-29E1-4F13-A49C-C25AE91E6A3E}" dt="2023-08-24T13:52:47.429" v="0" actId="47"/>
+        <pc:sldMkLst>
+          <pc:docMk/>
+          <pc:sldMk cId="997338478" sldId="931"/>
+        </pc:sldMkLst>
+      </pc:sldChg>
+      <pc:sldChg chg="modNotesTx">
+        <pc:chgData name="James Pengelly" userId="d269fecd-a8a2-4e5a-93ae-88bdaab21f51" providerId="ADAL" clId="{36A8BE69-29E1-4F13-A49C-C25AE91E6A3E}" dt="2023-09-06T14:52:39.941" v="612" actId="20577"/>
+        <pc:sldMkLst>
+          <pc:docMk/>
+          <pc:sldMk cId="2104262924" sldId="932"/>
+        </pc:sldMkLst>
+      </pc:sldChg>
+      <pc:sldChg chg="del">
+        <pc:chgData name="James Pengelly" userId="d269fecd-a8a2-4e5a-93ae-88bdaab21f51" providerId="ADAL" clId="{36A8BE69-29E1-4F13-A49C-C25AE91E6A3E}" dt="2023-08-24T13:52:53.649" v="1" actId="47"/>
+        <pc:sldMkLst>
+          <pc:docMk/>
+          <pc:sldMk cId="494846069" sldId="933"/>
+        </pc:sldMkLst>
+      </pc:sldChg>
+      <pc:sldChg chg="modSp new mod">
+        <pc:chgData name="James Pengelly" userId="d269fecd-a8a2-4e5a-93ae-88bdaab21f51" providerId="ADAL" clId="{36A8BE69-29E1-4F13-A49C-C25AE91E6A3E}" dt="2023-09-06T11:00:47.955" v="15" actId="20577"/>
+        <pc:sldMkLst>
+          <pc:docMk/>
+          <pc:sldMk cId="2185293454" sldId="933"/>
+        </pc:sldMkLst>
+        <pc:spChg chg="mod">
+          <ac:chgData name="James Pengelly" userId="d269fecd-a8a2-4e5a-93ae-88bdaab21f51" providerId="ADAL" clId="{36A8BE69-29E1-4F13-A49C-C25AE91E6A3E}" dt="2023-09-06T11:00:33.026" v="12" actId="20577"/>
+          <ac:spMkLst>
+            <pc:docMk/>
+            <pc:sldMk cId="2185293454" sldId="933"/>
+            <ac:spMk id="2" creationId="{C3ACE9C7-B5BE-F6DF-AA20-3C9126F3FAB3}"/>
+          </ac:spMkLst>
+        </pc:spChg>
+        <pc:spChg chg="mod">
+          <ac:chgData name="James Pengelly" userId="d269fecd-a8a2-4e5a-93ae-88bdaab21f51" providerId="ADAL" clId="{36A8BE69-29E1-4F13-A49C-C25AE91E6A3E}" dt="2023-09-06T11:00:47.955" v="15" actId="20577"/>
+          <ac:spMkLst>
+            <pc:docMk/>
+            <pc:sldMk cId="2185293454" sldId="933"/>
+            <ac:spMk id="3" creationId="{D6AD5D8A-D949-A9C2-87EB-FA7DCB8EA01F}"/>
+          </ac:spMkLst>
+        </pc:spChg>
+      </pc:sldChg>
+      <pc:sldChg chg="del">
+        <pc:chgData name="James Pengelly" userId="d269fecd-a8a2-4e5a-93ae-88bdaab21f51" providerId="ADAL" clId="{36A8BE69-29E1-4F13-A49C-C25AE91E6A3E}" dt="2023-08-24T13:52:53.649" v="1" actId="47"/>
+        <pc:sldMkLst>
+          <pc:docMk/>
+          <pc:sldMk cId="3261149061" sldId="934"/>
+        </pc:sldMkLst>
+      </pc:sldChg>
+      <pc:sldChg chg="modSp new mod">
+        <pc:chgData name="James Pengelly" userId="d269fecd-a8a2-4e5a-93ae-88bdaab21f51" providerId="ADAL" clId="{36A8BE69-29E1-4F13-A49C-C25AE91E6A3E}" dt="2023-09-06T11:14:06.805" v="290" actId="20577"/>
+        <pc:sldMkLst>
+          <pc:docMk/>
+          <pc:sldMk cId="3796021345" sldId="934"/>
+        </pc:sldMkLst>
+        <pc:spChg chg="mod">
+          <ac:chgData name="James Pengelly" userId="d269fecd-a8a2-4e5a-93ae-88bdaab21f51" providerId="ADAL" clId="{36A8BE69-29E1-4F13-A49C-C25AE91E6A3E}" dt="2023-09-06T11:14:06.805" v="290" actId="20577"/>
+          <ac:spMkLst>
+            <pc:docMk/>
+            <pc:sldMk cId="3796021345" sldId="934"/>
+            <ac:spMk id="2" creationId="{F8FC1255-2581-1A7F-FCCA-D503E0D77042}"/>
+          </ac:spMkLst>
+        </pc:spChg>
+        <pc:spChg chg="mod">
+          <ac:chgData name="James Pengelly" userId="d269fecd-a8a2-4e5a-93ae-88bdaab21f51" providerId="ADAL" clId="{36A8BE69-29E1-4F13-A49C-C25AE91E6A3E}" dt="2023-09-06T11:10:24.001" v="31" actId="20577"/>
+          <ac:spMkLst>
+            <pc:docMk/>
+            <pc:sldMk cId="3796021345" sldId="934"/>
+            <ac:spMk id="3" creationId="{ACC2595F-1A0C-E310-71B6-CD400B9A1424}"/>
+          </ac:spMkLst>
+        </pc:spChg>
+      </pc:sldChg>
+      <pc:sldChg chg="del">
+        <pc:chgData name="James Pengelly" userId="d269fecd-a8a2-4e5a-93ae-88bdaab21f51" providerId="ADAL" clId="{36A8BE69-29E1-4F13-A49C-C25AE91E6A3E}" dt="2023-08-24T13:52:53.649" v="1" actId="47"/>
+        <pc:sldMkLst>
+          <pc:docMk/>
+          <pc:sldMk cId="500033866" sldId="935"/>
+        </pc:sldMkLst>
+      </pc:sldChg>
+      <pc:sldChg chg="modSp new mod">
+        <pc:chgData name="James Pengelly" userId="d269fecd-a8a2-4e5a-93ae-88bdaab21f51" providerId="ADAL" clId="{36A8BE69-29E1-4F13-A49C-C25AE91E6A3E}" dt="2023-09-06T11:16:22.283" v="580" actId="27636"/>
+        <pc:sldMkLst>
+          <pc:docMk/>
+          <pc:sldMk cId="3375489181" sldId="935"/>
+        </pc:sldMkLst>
+        <pc:spChg chg="mod">
+          <ac:chgData name="James Pengelly" userId="d269fecd-a8a2-4e5a-93ae-88bdaab21f51" providerId="ADAL" clId="{36A8BE69-29E1-4F13-A49C-C25AE91E6A3E}" dt="2023-09-06T11:16:22.283" v="580" actId="27636"/>
+          <ac:spMkLst>
+            <pc:docMk/>
+            <pc:sldMk cId="3375489181" sldId="935"/>
+            <ac:spMk id="2" creationId="{EE246713-112A-5313-DB31-462CE11A65C7}"/>
+          </ac:spMkLst>
+        </pc:spChg>
+        <pc:spChg chg="mod">
+          <ac:chgData name="James Pengelly" userId="d269fecd-a8a2-4e5a-93ae-88bdaab21f51" providerId="ADAL" clId="{36A8BE69-29E1-4F13-A49C-C25AE91E6A3E}" dt="2023-09-06T11:10:33.970" v="52" actId="20577"/>
+          <ac:spMkLst>
+            <pc:docMk/>
+            <pc:sldMk cId="3375489181" sldId="935"/>
+            <ac:spMk id="3" creationId="{24F1EF39-7BDE-B966-CA26-FBAA55EF3427}"/>
+          </ac:spMkLst>
+        </pc:spChg>
+      </pc:sldChg>
+      <pc:sldChg chg="modSp new mod">
+        <pc:chgData name="James Pengelly" userId="d269fecd-a8a2-4e5a-93ae-88bdaab21f51" providerId="ADAL" clId="{36A8BE69-29E1-4F13-A49C-C25AE91E6A3E}" dt="2023-09-06T11:12:33.621" v="104" actId="20577"/>
+        <pc:sldMkLst>
+          <pc:docMk/>
+          <pc:sldMk cId="114506518" sldId="936"/>
+        </pc:sldMkLst>
+        <pc:spChg chg="mod">
+          <ac:chgData name="James Pengelly" userId="d269fecd-a8a2-4e5a-93ae-88bdaab21f51" providerId="ADAL" clId="{36A8BE69-29E1-4F13-A49C-C25AE91E6A3E}" dt="2023-09-06T11:12:33.621" v="104" actId="20577"/>
+          <ac:spMkLst>
+            <pc:docMk/>
+            <pc:sldMk cId="114506518" sldId="936"/>
+            <ac:spMk id="2" creationId="{F4D88CD3-752B-889F-2492-33F1622D6817}"/>
+          </ac:spMkLst>
+        </pc:spChg>
+        <pc:spChg chg="mod">
+          <ac:chgData name="James Pengelly" userId="d269fecd-a8a2-4e5a-93ae-88bdaab21f51" providerId="ADAL" clId="{36A8BE69-29E1-4F13-A49C-C25AE91E6A3E}" dt="2023-09-06T11:10:42.539" v="71" actId="20577"/>
+          <ac:spMkLst>
+            <pc:docMk/>
+            <pc:sldMk cId="114506518" sldId="936"/>
+            <ac:spMk id="3" creationId="{067FA03E-66AA-D825-D930-DD7B57D7F0BF}"/>
+          </ac:spMkLst>
+        </pc:spChg>
+      </pc:sldChg>
+      <pc:sldChg chg="del">
+        <pc:chgData name="James Pengelly" userId="d269fecd-a8a2-4e5a-93ae-88bdaab21f51" providerId="ADAL" clId="{36A8BE69-29E1-4F13-A49C-C25AE91E6A3E}" dt="2023-08-24T13:52:53.649" v="1" actId="47"/>
+        <pc:sldMkLst>
+          <pc:docMk/>
+          <pc:sldMk cId="2656603284" sldId="936"/>
+        </pc:sldMkLst>
+      </pc:sldChg>
+      <pc:sldChg chg="del">
+        <pc:chgData name="James Pengelly" userId="d269fecd-a8a2-4e5a-93ae-88bdaab21f51" providerId="ADAL" clId="{36A8BE69-29E1-4F13-A49C-C25AE91E6A3E}" dt="2023-08-24T13:52:53.649" v="1" actId="47"/>
+        <pc:sldMkLst>
+          <pc:docMk/>
+          <pc:sldMk cId="1298247145" sldId="937"/>
+        </pc:sldMkLst>
+      </pc:sldChg>
+    </pc:docChg>
+  </pc:docChgLst>
+</pc:chgInfo>
+</file>
+
 <file path=ppt/handoutMasters/handoutMaster1.xml><?xml version="1.0" encoding="utf-8"?>
 <p:handoutMaster xmlns:a="http://schemas.openxmlformats.org/drawingml/2006/main" xmlns:r="http://schemas.openxmlformats.org/officeDocument/2006/relationships" xmlns:p="http://schemas.openxmlformats.org/presentationml/2006/main">
   <p:cSld>
@@ -1449,7 +2996,7 @@
             <a:fld id="{B7CF8A19-3A9E-4ABC-B336-2FDDE321C72D}" type="slidenum">
               <a:rPr lang="en-US" smtClean="0"/>
               <a:pPr/>
-              <a:t>20</a:t>
+              <a:t>21</a:t>
             </a:fld>
             <a:endParaRPr lang="en-US"/>
           </a:p>
@@ -1551,7 +3098,7 @@
             <a:fld id="{B7CF8A19-3A9E-4ABC-B336-2FDDE321C72D}" type="slidenum">
               <a:rPr lang="en-US" smtClean="0"/>
               <a:pPr/>
-              <a:t>21</a:t>
+              <a:t>22</a:t>
             </a:fld>
             <a:endParaRPr lang="en-US"/>
           </a:p>
@@ -1644,7 +3191,7 @@
             <a:fld id="{B7CF8A19-3A9E-4ABC-B336-2FDDE321C72D}" type="slidenum">
               <a:rPr lang="en-US" smtClean="0"/>
               <a:pPr/>
-              <a:t>23</a:t>
+              <a:t>24</a:t>
             </a:fld>
             <a:endParaRPr lang="en-US"/>
           </a:p>
@@ -1737,7 +3284,7 @@
             <a:fld id="{B7CF8A19-3A9E-4ABC-B336-2FDDE321C72D}" type="slidenum">
               <a:rPr lang="en-US" smtClean="0"/>
               <a:pPr/>
-              <a:t>25</a:t>
+              <a:t>26</a:t>
             </a:fld>
             <a:endParaRPr lang="en-US"/>
           </a:p>
@@ -1957,7 +3504,7 @@
             <a:fld id="{B7CF8A19-3A9E-4ABC-B336-2FDDE321C72D}" type="slidenum">
               <a:rPr lang="en-US" smtClean="0"/>
               <a:pPr/>
-              <a:t>27</a:t>
+              <a:t>29</a:t>
             </a:fld>
             <a:endParaRPr lang="en-US"/>
           </a:p>
@@ -8898,102 +10445,18 @@
       </p:grpSpPr>
       <p:sp>
         <p:nvSpPr>
-          <p:cNvPr id="2" name="Title 1">
-            <a:extLst>
-              <a:ext uri="{FF2B5EF4-FFF2-40B4-BE49-F238E27FC236}">
-                <a16:creationId xmlns:a16="http://schemas.microsoft.com/office/drawing/2014/main" id="{B384D34B-97FF-CCB8-2DF3-29C50AB57BFC}"/>
-              </a:ext>
-            </a:extLst>
-          </p:cNvPr>
-          <p:cNvSpPr>
-            <a:spLocks noGrp="1"/>
-          </p:cNvSpPr>
-          <p:nvPr>
-            <p:ph type="ctrTitle"/>
-          </p:nvPr>
-        </p:nvSpPr>
-        <p:spPr/>
-        <p:txBody>
-          <a:bodyPr/>
-          <a:lstStyle/>
-          <a:p>
-            <a:r>
-              <a:rPr lang="en-US" noProof="0" dirty="0"/>
-              <a:t>Social Engineering</a:t>
-            </a:r>
-          </a:p>
-        </p:txBody>
-      </p:sp>
-      <p:sp>
-        <p:nvSpPr>
-          <p:cNvPr id="3" name="Subtitle 2">
-            <a:extLst>
-              <a:ext uri="{FF2B5EF4-FFF2-40B4-BE49-F238E27FC236}">
-                <a16:creationId xmlns:a16="http://schemas.microsoft.com/office/drawing/2014/main" id="{045240B9-4836-CB4C-7AA7-19958C6DC8BC}"/>
-              </a:ext>
-            </a:extLst>
-          </p:cNvPr>
-          <p:cNvSpPr>
-            <a:spLocks noGrp="1"/>
-          </p:cNvSpPr>
-          <p:nvPr>
-            <p:ph type="subTitle" idx="1"/>
-          </p:nvPr>
-        </p:nvSpPr>
-        <p:spPr/>
-        <p:txBody>
-          <a:bodyPr/>
-          <a:lstStyle/>
-          <a:p>
-            <a:r>
-              <a:rPr lang="en-US" noProof="0" dirty="0"/>
-              <a:t>Topic 2C</a:t>
-            </a:r>
-          </a:p>
-        </p:txBody>
-      </p:sp>
-      <p:sp>
-        <p:nvSpPr>
-          <p:cNvPr id="4" name="Text Placeholder 3">
-            <a:extLst>
-              <a:ext uri="{FF2B5EF4-FFF2-40B4-BE49-F238E27FC236}">
-                <a16:creationId xmlns:a16="http://schemas.microsoft.com/office/drawing/2014/main" id="{0AE96607-3833-EAA2-608A-4B298EEACB21}"/>
-              </a:ext>
-            </a:extLst>
-          </p:cNvPr>
-          <p:cNvSpPr>
-            <a:spLocks noGrp="1"/>
-          </p:cNvSpPr>
-          <p:nvPr>
-            <p:ph type="body" sz="quarter" idx="12"/>
-          </p:nvPr>
-        </p:nvSpPr>
-        <p:spPr/>
-        <p:txBody>
-          <a:bodyPr/>
-          <a:lstStyle/>
-          <a:p>
-            <a:r>
-              <a:rPr lang="en-US" noProof="0" dirty="0"/>
-              <a:t>Lesson 2</a:t>
-            </a:r>
-          </a:p>
-        </p:txBody>
-      </p:sp>
-      <p:sp>
-        <p:nvSpPr>
-          <p:cNvPr id="5" name="Slide Number Placeholder 4">
-            <a:extLst>
-              <a:ext uri="{FF2B5EF4-FFF2-40B4-BE49-F238E27FC236}">
-                <a16:creationId xmlns:a16="http://schemas.microsoft.com/office/drawing/2014/main" id="{A2328C14-E12D-35B1-F2E0-2DFFE3B60AA0}"/>
-              </a:ext>
-            </a:extLst>
-          </p:cNvPr>
-          <p:cNvSpPr>
-            <a:spLocks noGrp="1"/>
-          </p:cNvSpPr>
-          <p:nvPr>
-            <p:ph type="sldNum" sz="quarter" idx="10"/>
+          <p:cNvPr id="4" name="Slide Number Placeholder 3">
+            <a:extLst>
+              <a:ext uri="{FF2B5EF4-FFF2-40B4-BE49-F238E27FC236}">
+                <a16:creationId xmlns:a16="http://schemas.microsoft.com/office/drawing/2014/main" id="{3B701D45-5005-6861-560D-B8A7EC1DFFCE}"/>
+              </a:ext>
+            </a:extLst>
+          </p:cNvPr>
+          <p:cNvSpPr>
+            <a:spLocks noGrp="1"/>
+          </p:cNvSpPr>
+          <p:nvPr>
+            <p:ph type="sldNum" sz="quarter" idx="13"/>
           </p:nvPr>
         </p:nvSpPr>
         <p:spPr/>
@@ -9010,10 +10473,38 @@
           </a:p>
         </p:txBody>
       </p:sp>
+      <p:sp>
+        <p:nvSpPr>
+          <p:cNvPr id="5" name="Content Placeholder 4">
+            <a:extLst>
+              <a:ext uri="{FF2B5EF4-FFF2-40B4-BE49-F238E27FC236}">
+                <a16:creationId xmlns:a16="http://schemas.microsoft.com/office/drawing/2014/main" id="{0F7E2146-C7AF-9ADA-8F14-9FF8692BA1B8}"/>
+              </a:ext>
+            </a:extLst>
+          </p:cNvPr>
+          <p:cNvSpPr>
+            <a:spLocks noGrp="1"/>
+          </p:cNvSpPr>
+          <p:nvPr>
+            <p:ph sz="quarter" idx="14"/>
+          </p:nvPr>
+        </p:nvSpPr>
+        <p:spPr/>
+        <p:txBody>
+          <a:bodyPr/>
+          <a:lstStyle/>
+          <a:p>
+            <a:r>
+              <a:rPr lang="en-US" dirty="0"/>
+              <a:t>Assisted Lab: Finding Open Service Ports</a:t>
+            </a:r>
+          </a:p>
+        </p:txBody>
+      </p:sp>
     </p:spTree>
     <p:extLst>
       <p:ext uri="{BB962C8B-B14F-4D97-AF65-F5344CB8AC3E}">
-        <p14:creationId xmlns:p14="http://schemas.microsoft.com/office/powerpoint/2010/main" val="3349349304"/>
+        <p14:creationId xmlns:p14="http://schemas.microsoft.com/office/powerpoint/2010/main" val="408307851"/>
       </p:ext>
     </p:extLst>
   </p:cSld>
@@ -9045,15 +10536,15 @@
           <p:cNvPr id="2" name="Title 1">
             <a:extLst>
               <a:ext uri="{FF2B5EF4-FFF2-40B4-BE49-F238E27FC236}">
-                <a16:creationId xmlns:a16="http://schemas.microsoft.com/office/drawing/2014/main" id="{9B2C2047-B0D8-44C7-48FA-B3A128284B01}"/>
-              </a:ext>
-            </a:extLst>
-          </p:cNvPr>
-          <p:cNvSpPr>
-            <a:spLocks noGrp="1"/>
-          </p:cNvSpPr>
-          <p:nvPr>
-            <p:ph type="title"/>
+                <a16:creationId xmlns:a16="http://schemas.microsoft.com/office/drawing/2014/main" id="{B384D34B-97FF-CCB8-2DF3-29C50AB57BFC}"/>
+              </a:ext>
+            </a:extLst>
+          </p:cNvPr>
+          <p:cNvSpPr>
+            <a:spLocks noGrp="1"/>
+          </p:cNvSpPr>
+          <p:nvPr>
+            <p:ph type="ctrTitle"/>
           </p:nvPr>
         </p:nvSpPr>
         <p:spPr/>
@@ -9063,97 +10554,73 @@
           <a:p>
             <a:r>
               <a:rPr lang="en-US" noProof="0" dirty="0"/>
-              <a:t>Human Vectors</a:t>
-            </a:r>
-          </a:p>
-        </p:txBody>
-      </p:sp>
-      <p:sp>
-        <p:nvSpPr>
-          <p:cNvPr id="3" name="Content Placeholder 2">
-            <a:extLst>
-              <a:ext uri="{FF2B5EF4-FFF2-40B4-BE49-F238E27FC236}">
-                <a16:creationId xmlns:a16="http://schemas.microsoft.com/office/drawing/2014/main" id="{090DCA3E-601E-2125-99C2-4573EA7562B7}"/>
-              </a:ext>
-            </a:extLst>
-          </p:cNvPr>
-          <p:cNvSpPr>
-            <a:spLocks noGrp="1"/>
-          </p:cNvSpPr>
-          <p:nvPr>
-            <p:ph idx="1"/>
+              <a:t>Social Engineering</a:t>
+            </a:r>
+          </a:p>
+        </p:txBody>
+      </p:sp>
+      <p:sp>
+        <p:nvSpPr>
+          <p:cNvPr id="3" name="Subtitle 2">
+            <a:extLst>
+              <a:ext uri="{FF2B5EF4-FFF2-40B4-BE49-F238E27FC236}">
+                <a16:creationId xmlns:a16="http://schemas.microsoft.com/office/drawing/2014/main" id="{045240B9-4836-CB4C-7AA7-19958C6DC8BC}"/>
+              </a:ext>
+            </a:extLst>
+          </p:cNvPr>
+          <p:cNvSpPr>
+            <a:spLocks noGrp="1"/>
+          </p:cNvSpPr>
+          <p:nvPr>
+            <p:ph type="subTitle" idx="1"/>
           </p:nvPr>
         </p:nvSpPr>
         <p:spPr/>
         <p:txBody>
-          <a:bodyPr>
-            <a:normAutofit lnSpcReduction="10000"/>
-          </a:bodyPr>
+          <a:bodyPr/>
           <a:lstStyle/>
           <a:p>
             <a:r>
               <a:rPr lang="en-US" noProof="0" dirty="0"/>
-              <a:t>“Hacking the human”​</a:t>
-            </a:r>
-          </a:p>
+              <a:t>Topic 2C</a:t>
+            </a:r>
+          </a:p>
+        </p:txBody>
+      </p:sp>
+      <p:sp>
+        <p:nvSpPr>
+          <p:cNvPr id="4" name="Text Placeholder 3">
+            <a:extLst>
+              <a:ext uri="{FF2B5EF4-FFF2-40B4-BE49-F238E27FC236}">
+                <a16:creationId xmlns:a16="http://schemas.microsoft.com/office/drawing/2014/main" id="{0AE96607-3833-EAA2-608A-4B298EEACB21}"/>
+              </a:ext>
+            </a:extLst>
+          </p:cNvPr>
+          <p:cNvSpPr>
+            <a:spLocks noGrp="1"/>
+          </p:cNvSpPr>
+          <p:nvPr>
+            <p:ph type="body" sz="quarter" idx="12"/>
+          </p:nvPr>
+        </p:nvSpPr>
+        <p:spPr/>
+        <p:txBody>
+          <a:bodyPr/>
+          <a:lstStyle/>
           <a:p>
             <a:r>
               <a:rPr lang="en-US" noProof="0" dirty="0"/>
-              <a:t>Purposes of social engineering​</a:t>
-            </a:r>
-          </a:p>
-          <a:p>
-            <a:pPr lvl="1"/>
-            <a:r>
-              <a:rPr lang="en-US" noProof="0" dirty="0"/>
-              <a:t>Reconnaissance and eliciting information​</a:t>
-            </a:r>
-          </a:p>
-          <a:p>
-            <a:pPr lvl="1"/>
-            <a:r>
-              <a:rPr lang="en-US" noProof="0" dirty="0"/>
-              <a:t>Intrusion and gaining unauthorized access​</a:t>
-            </a:r>
-          </a:p>
-          <a:p>
-            <a:r>
-              <a:rPr lang="en-US" noProof="0" dirty="0"/>
-              <a:t>Many possible scenarios​</a:t>
-            </a:r>
-          </a:p>
-          <a:p>
-            <a:pPr lvl="1"/>
-            <a:r>
-              <a:rPr lang="en-US" noProof="0" dirty="0"/>
-              <a:t>Persuade a user to run a malicious file​</a:t>
-            </a:r>
-          </a:p>
-          <a:p>
-            <a:pPr lvl="1"/>
-            <a:r>
-              <a:rPr lang="en-US" noProof="0" dirty="0"/>
-              <a:t>Contact a help desk and solicit information​</a:t>
-            </a:r>
-          </a:p>
-          <a:p>
-            <a:pPr lvl="1"/>
-            <a:r>
-              <a:rPr lang="en-US" noProof="0" dirty="0"/>
-              <a:t>Gain access to premises and install a monitoring device​</a:t>
-            </a:r>
-          </a:p>
-          <a:p>
-            <a:endParaRPr lang="en-US" noProof="0" dirty="0"/>
-          </a:p>
-        </p:txBody>
-      </p:sp>
-      <p:sp>
-        <p:nvSpPr>
-          <p:cNvPr id="4" name="Slide Number Placeholder 3">
-            <a:extLst>
-              <a:ext uri="{FF2B5EF4-FFF2-40B4-BE49-F238E27FC236}">
-                <a16:creationId xmlns:a16="http://schemas.microsoft.com/office/drawing/2014/main" id="{E173F535-788B-072A-23CA-41746BE1809D}"/>
+              <a:t>Lesson 2</a:t>
+            </a:r>
+          </a:p>
+        </p:txBody>
+      </p:sp>
+      <p:sp>
+        <p:nvSpPr>
+          <p:cNvPr id="5" name="Slide Number Placeholder 4">
+            <a:extLst>
+              <a:ext uri="{FF2B5EF4-FFF2-40B4-BE49-F238E27FC236}">
+                <a16:creationId xmlns:a16="http://schemas.microsoft.com/office/drawing/2014/main" id="{A2328C14-E12D-35B1-F2E0-2DFFE3B60AA0}"/>
               </a:ext>
             </a:extLst>
           </p:cNvPr>
@@ -9181,7 +10648,7 @@
     </p:spTree>
     <p:extLst>
       <p:ext uri="{BB962C8B-B14F-4D97-AF65-F5344CB8AC3E}">
-        <p14:creationId xmlns:p14="http://schemas.microsoft.com/office/powerpoint/2010/main" val="2684385073"/>
+        <p14:creationId xmlns:p14="http://schemas.microsoft.com/office/powerpoint/2010/main" val="3349349304"/>
       </p:ext>
     </p:extLst>
   </p:cSld>
@@ -9213,7 +10680,7 @@
           <p:cNvPr id="2" name="Title 1">
             <a:extLst>
               <a:ext uri="{FF2B5EF4-FFF2-40B4-BE49-F238E27FC236}">
-                <a16:creationId xmlns:a16="http://schemas.microsoft.com/office/drawing/2014/main" id="{B7EA6AE8-CFF9-CC5F-7AEA-7C4ACB230CDC}"/>
+                <a16:creationId xmlns:a16="http://schemas.microsoft.com/office/drawing/2014/main" id="{9B2C2047-B0D8-44C7-48FA-B3A128284B01}"/>
               </a:ext>
             </a:extLst>
           </p:cNvPr>
@@ -9231,25 +10698,105 @@
           <a:p>
             <a:r>
               <a:rPr lang="en-US" noProof="0" dirty="0"/>
-              <a:t>Impersonation and Pretexting​</a:t>
-            </a:r>
-          </a:p>
-        </p:txBody>
-      </p:sp>
-      <p:sp>
-        <p:nvSpPr>
-          <p:cNvPr id="5" name="Slide Number Placeholder 4">
-            <a:extLst>
-              <a:ext uri="{FF2B5EF4-FFF2-40B4-BE49-F238E27FC236}">
-                <a16:creationId xmlns:a16="http://schemas.microsoft.com/office/drawing/2014/main" id="{03270DD8-2117-AA67-EBF2-752173FC143A}"/>
-              </a:ext>
-            </a:extLst>
-          </p:cNvPr>
-          <p:cNvSpPr>
-            <a:spLocks noGrp="1"/>
-          </p:cNvSpPr>
-          <p:nvPr>
-            <p:ph type="sldNum" sz="quarter" idx="13"/>
+              <a:t>Human Vectors</a:t>
+            </a:r>
+          </a:p>
+        </p:txBody>
+      </p:sp>
+      <p:sp>
+        <p:nvSpPr>
+          <p:cNvPr id="3" name="Content Placeholder 2">
+            <a:extLst>
+              <a:ext uri="{FF2B5EF4-FFF2-40B4-BE49-F238E27FC236}">
+                <a16:creationId xmlns:a16="http://schemas.microsoft.com/office/drawing/2014/main" id="{090DCA3E-601E-2125-99C2-4573EA7562B7}"/>
+              </a:ext>
+            </a:extLst>
+          </p:cNvPr>
+          <p:cNvSpPr>
+            <a:spLocks noGrp="1"/>
+          </p:cNvSpPr>
+          <p:nvPr>
+            <p:ph idx="1"/>
+          </p:nvPr>
+        </p:nvSpPr>
+        <p:spPr/>
+        <p:txBody>
+          <a:bodyPr>
+            <a:normAutofit lnSpcReduction="10000"/>
+          </a:bodyPr>
+          <a:lstStyle/>
+          <a:p>
+            <a:r>
+              <a:rPr lang="en-US" noProof="0" dirty="0"/>
+              <a:t>“Hacking the human”​</a:t>
+            </a:r>
+          </a:p>
+          <a:p>
+            <a:r>
+              <a:rPr lang="en-US" noProof="0" dirty="0"/>
+              <a:t>Purposes of social engineering​</a:t>
+            </a:r>
+          </a:p>
+          <a:p>
+            <a:pPr lvl="1"/>
+            <a:r>
+              <a:rPr lang="en-US" noProof="0" dirty="0"/>
+              <a:t>Reconnaissance and eliciting information​</a:t>
+            </a:r>
+          </a:p>
+          <a:p>
+            <a:pPr lvl="1"/>
+            <a:r>
+              <a:rPr lang="en-US" noProof="0" dirty="0"/>
+              <a:t>Intrusion and gaining unauthorized access​</a:t>
+            </a:r>
+          </a:p>
+          <a:p>
+            <a:r>
+              <a:rPr lang="en-US" noProof="0" dirty="0"/>
+              <a:t>Many possible scenarios​</a:t>
+            </a:r>
+          </a:p>
+          <a:p>
+            <a:pPr lvl="1"/>
+            <a:r>
+              <a:rPr lang="en-US" noProof="0" dirty="0"/>
+              <a:t>Persuade a user to run a malicious file​</a:t>
+            </a:r>
+          </a:p>
+          <a:p>
+            <a:pPr lvl="1"/>
+            <a:r>
+              <a:rPr lang="en-US" noProof="0" dirty="0"/>
+              <a:t>Contact a help desk and solicit information​</a:t>
+            </a:r>
+          </a:p>
+          <a:p>
+            <a:pPr lvl="1"/>
+            <a:r>
+              <a:rPr lang="en-US" noProof="0" dirty="0"/>
+              <a:t>Gain access to premises and install a monitoring device​</a:t>
+            </a:r>
+          </a:p>
+          <a:p>
+            <a:endParaRPr lang="en-US" noProof="0" dirty="0"/>
+          </a:p>
+        </p:txBody>
+      </p:sp>
+      <p:sp>
+        <p:nvSpPr>
+          <p:cNvPr id="4" name="Slide Number Placeholder 3">
+            <a:extLst>
+              <a:ext uri="{FF2B5EF4-FFF2-40B4-BE49-F238E27FC236}">
+                <a16:creationId xmlns:a16="http://schemas.microsoft.com/office/drawing/2014/main" id="{E173F535-788B-072A-23CA-41746BE1809D}"/>
+              </a:ext>
+            </a:extLst>
+          </p:cNvPr>
+          <p:cNvSpPr>
+            <a:spLocks noGrp="1"/>
+          </p:cNvSpPr>
+          <p:nvPr>
+            <p:ph type="sldNum" sz="quarter" idx="10"/>
           </p:nvPr>
         </p:nvSpPr>
         <p:spPr/>
@@ -9261,6 +10808,94 @@
               <a:rPr lang="en-US" smtClean="0"/>
               <a:pPr/>
               <a:t>22</a:t>
+            </a:fld>
+            <a:endParaRPr lang="en-US"/>
+          </a:p>
+        </p:txBody>
+      </p:sp>
+    </p:spTree>
+    <p:extLst>
+      <p:ext uri="{BB962C8B-B14F-4D97-AF65-F5344CB8AC3E}">
+        <p14:creationId xmlns:p14="http://schemas.microsoft.com/office/powerpoint/2010/main" val="2684385073"/>
+      </p:ext>
+    </p:extLst>
+  </p:cSld>
+  <p:clrMapOvr>
+    <a:masterClrMapping/>
+  </p:clrMapOvr>
+</p:sld>
+</file>
+
+<file path=ppt/slides/slide23.xml><?xml version="1.0" encoding="utf-8"?>
+<p:sld xmlns:a="http://schemas.openxmlformats.org/drawingml/2006/main" xmlns:r="http://schemas.openxmlformats.org/officeDocument/2006/relationships" xmlns:p="http://schemas.openxmlformats.org/presentationml/2006/main">
+  <p:cSld>
+    <p:spTree>
+      <p:nvGrpSpPr>
+        <p:cNvPr id="1" name=""/>
+        <p:cNvGrpSpPr/>
+        <p:nvPr/>
+      </p:nvGrpSpPr>
+      <p:grpSpPr>
+        <a:xfrm>
+          <a:off x="0" y="0"/>
+          <a:ext cx="0" cy="0"/>
+          <a:chOff x="0" y="0"/>
+          <a:chExt cx="0" cy="0"/>
+        </a:xfrm>
+      </p:grpSpPr>
+      <p:sp>
+        <p:nvSpPr>
+          <p:cNvPr id="2" name="Title 1">
+            <a:extLst>
+              <a:ext uri="{FF2B5EF4-FFF2-40B4-BE49-F238E27FC236}">
+                <a16:creationId xmlns:a16="http://schemas.microsoft.com/office/drawing/2014/main" id="{B7EA6AE8-CFF9-CC5F-7AEA-7C4ACB230CDC}"/>
+              </a:ext>
+            </a:extLst>
+          </p:cNvPr>
+          <p:cNvSpPr>
+            <a:spLocks noGrp="1"/>
+          </p:cNvSpPr>
+          <p:nvPr>
+            <p:ph type="title"/>
+          </p:nvPr>
+        </p:nvSpPr>
+        <p:spPr/>
+        <p:txBody>
+          <a:bodyPr/>
+          <a:lstStyle/>
+          <a:p>
+            <a:r>
+              <a:rPr lang="en-US" noProof="0" dirty="0"/>
+              <a:t>Impersonation and Pretexting​</a:t>
+            </a:r>
+          </a:p>
+        </p:txBody>
+      </p:sp>
+      <p:sp>
+        <p:nvSpPr>
+          <p:cNvPr id="5" name="Slide Number Placeholder 4">
+            <a:extLst>
+              <a:ext uri="{FF2B5EF4-FFF2-40B4-BE49-F238E27FC236}">
+                <a16:creationId xmlns:a16="http://schemas.microsoft.com/office/drawing/2014/main" id="{03270DD8-2117-AA67-EBF2-752173FC143A}"/>
+              </a:ext>
+            </a:extLst>
+          </p:cNvPr>
+          <p:cNvSpPr>
+            <a:spLocks noGrp="1"/>
+          </p:cNvSpPr>
+          <p:nvPr>
+            <p:ph type="sldNum" sz="quarter" idx="13"/>
+          </p:nvPr>
+        </p:nvSpPr>
+        <p:spPr/>
+        <p:txBody>
+          <a:bodyPr/>
+          <a:lstStyle/>
+          <a:p>
+            <a:fld id="{B7CF8A19-3A9E-4ABC-B336-2FDDE321C72D}" type="slidenum">
+              <a:rPr lang="en-US" smtClean="0"/>
+              <a:pPr/>
+              <a:t>23</a:t>
             </a:fld>
             <a:endParaRPr lang="en-US"/>
           </a:p>
@@ -9395,227 +11030,6 @@
 </p:sld>
 </file>
 
-<file path=ppt/slides/slide23.xml><?xml version="1.0" encoding="utf-8"?>
-<p:sld xmlns:a="http://schemas.openxmlformats.org/drawingml/2006/main" xmlns:r="http://schemas.openxmlformats.org/officeDocument/2006/relationships" xmlns:p="http://schemas.openxmlformats.org/presentationml/2006/main">
-  <p:cSld>
-    <p:spTree>
-      <p:nvGrpSpPr>
-        <p:cNvPr id="1" name=""/>
-        <p:cNvGrpSpPr/>
-        <p:nvPr/>
-      </p:nvGrpSpPr>
-      <p:grpSpPr>
-        <a:xfrm>
-          <a:off x="0" y="0"/>
-          <a:ext cx="0" cy="0"/>
-          <a:chOff x="0" y="0"/>
-          <a:chExt cx="0" cy="0"/>
-        </a:xfrm>
-      </p:grpSpPr>
-      <p:sp>
-        <p:nvSpPr>
-          <p:cNvPr id="2" name="Title 1">
-            <a:extLst>
-              <a:ext uri="{FF2B5EF4-FFF2-40B4-BE49-F238E27FC236}">
-                <a16:creationId xmlns:a16="http://schemas.microsoft.com/office/drawing/2014/main" id="{AB1092C9-6560-8BD1-BBA8-43A442D0385E}"/>
-              </a:ext>
-            </a:extLst>
-          </p:cNvPr>
-          <p:cNvSpPr>
-            <a:spLocks noGrp="1"/>
-          </p:cNvSpPr>
-          <p:nvPr>
-            <p:ph type="title"/>
-          </p:nvPr>
-        </p:nvSpPr>
-        <p:spPr/>
-        <p:txBody>
-          <a:bodyPr/>
-          <a:lstStyle/>
-          <a:p>
-            <a:r>
-              <a:rPr lang="en-US" noProof="0" dirty="0"/>
-              <a:t>Phishing and Pharming</a:t>
-            </a:r>
-          </a:p>
-        </p:txBody>
-      </p:sp>
-      <p:pic>
-        <p:nvPicPr>
-          <p:cNvPr id="8194" name="Picture 2">
-            <a:extLst>
-              <a:ext uri="{FF2B5EF4-FFF2-40B4-BE49-F238E27FC236}">
-                <a16:creationId xmlns:a16="http://schemas.microsoft.com/office/drawing/2014/main" id="{A8087FD8-18EF-7725-A78C-DD5CD5C1F239}"/>
-              </a:ext>
-            </a:extLst>
-          </p:cNvPr>
-          <p:cNvPicPr>
-            <a:picLocks noGrp="1" noChangeAspect="1" noChangeArrowheads="1"/>
-          </p:cNvPicPr>
-          <p:nvPr>
-            <p:ph idx="1"/>
-          </p:nvPr>
-        </p:nvPicPr>
-        <p:blipFill>
-          <a:blip r:embed="rId3">
-            <a:extLst>
-              <a:ext uri="{28A0092B-C50C-407E-A947-70E740481C1C}">
-                <a14:useLocalDpi xmlns:a14="http://schemas.microsoft.com/office/drawing/2010/main" val="0"/>
-              </a:ext>
-            </a:extLst>
-          </a:blip>
-          <a:srcRect/>
-          <a:stretch>
-            <a:fillRect/>
-          </a:stretch>
-        </p:blipFill>
-        <p:spPr>
-          <a:xfrm>
-            <a:off x="146050" y="1593815"/>
-            <a:ext cx="4354513" cy="2351158"/>
-          </a:xfrm>
-        </p:spPr>
-      </p:pic>
-      <p:sp>
-        <p:nvSpPr>
-          <p:cNvPr id="4" name="Content Placeholder 3">
-            <a:extLst>
-              <a:ext uri="{FF2B5EF4-FFF2-40B4-BE49-F238E27FC236}">
-                <a16:creationId xmlns:a16="http://schemas.microsoft.com/office/drawing/2014/main" id="{CBC1DA6C-5CE5-6AE4-5CF7-B39FDB27AA93}"/>
-              </a:ext>
-            </a:extLst>
-          </p:cNvPr>
-          <p:cNvSpPr>
-            <a:spLocks noGrp="1"/>
-          </p:cNvSpPr>
-          <p:nvPr>
-            <p:ph idx="12"/>
-          </p:nvPr>
-        </p:nvSpPr>
-        <p:spPr>
-          <a:xfrm>
-            <a:off x="4636383" y="746760"/>
-            <a:ext cx="4380617" cy="4396740"/>
-          </a:xfrm>
-        </p:spPr>
-        <p:txBody>
-          <a:bodyPr>
-            <a:normAutofit fontScale="70000" lnSpcReduction="20000"/>
-          </a:bodyPr>
-          <a:lstStyle/>
-          <a:p>
-            <a:r>
-              <a:rPr lang="en-US" noProof="0" dirty="0"/>
-              <a:t>Phishing</a:t>
-            </a:r>
-          </a:p>
-          <a:p>
-            <a:pPr lvl="1"/>
-            <a:r>
-              <a:rPr lang="en-US" noProof="0" dirty="0"/>
-              <a:t>Trick target into using a malicious resource​</a:t>
-            </a:r>
-          </a:p>
-          <a:p>
-            <a:pPr lvl="1"/>
-            <a:r>
-              <a:rPr lang="en-US" noProof="0" dirty="0"/>
-              <a:t>Spoof legitimate communications and sites​</a:t>
-            </a:r>
-          </a:p>
-          <a:p>
-            <a:r>
-              <a:rPr lang="en-US" noProof="0" dirty="0"/>
-              <a:t>Vishing​</a:t>
-            </a:r>
-          </a:p>
-          <a:p>
-            <a:pPr lvl="1"/>
-            <a:r>
-              <a:rPr lang="en-US" noProof="0" dirty="0"/>
-              <a:t>Using a voice channel​</a:t>
-            </a:r>
-          </a:p>
-          <a:p>
-            <a:r>
-              <a:rPr lang="en-US" noProof="0" dirty="0"/>
-              <a:t>SMiShing​</a:t>
-            </a:r>
-          </a:p>
-          <a:p>
-            <a:pPr lvl="1"/>
-            <a:r>
-              <a:rPr lang="en-US" noProof="0" dirty="0"/>
-              <a:t>Using text messaging​​</a:t>
-            </a:r>
-          </a:p>
-          <a:p>
-            <a:r>
-              <a:rPr lang="en-US" noProof="0" dirty="0"/>
-              <a:t>Passive techniques have less risk of detection​</a:t>
-            </a:r>
-          </a:p>
-          <a:p>
-            <a:r>
-              <a:rPr lang="en-US" noProof="0" dirty="0"/>
-              <a:t>Pharming​</a:t>
-            </a:r>
-          </a:p>
-          <a:p>
-            <a:pPr lvl="1"/>
-            <a:r>
-              <a:rPr lang="en-US" noProof="0" dirty="0"/>
-              <a:t>Redirection by DNS spoofing​</a:t>
-            </a:r>
-          </a:p>
-          <a:p>
-            <a:endParaRPr lang="en-US" noProof="0" dirty="0"/>
-          </a:p>
-        </p:txBody>
-      </p:sp>
-      <p:sp>
-        <p:nvSpPr>
-          <p:cNvPr id="5" name="Slide Number Placeholder 4">
-            <a:extLst>
-              <a:ext uri="{FF2B5EF4-FFF2-40B4-BE49-F238E27FC236}">
-                <a16:creationId xmlns:a16="http://schemas.microsoft.com/office/drawing/2014/main" id="{13739AB0-1366-7EF8-7CE9-C8E0126E91D8}"/>
-              </a:ext>
-            </a:extLst>
-          </p:cNvPr>
-          <p:cNvSpPr>
-            <a:spLocks noGrp="1"/>
-          </p:cNvSpPr>
-          <p:nvPr>
-            <p:ph type="sldNum" sz="quarter" idx="13"/>
-          </p:nvPr>
-        </p:nvSpPr>
-        <p:spPr/>
-        <p:txBody>
-          <a:bodyPr/>
-          <a:lstStyle/>
-          <a:p>
-            <a:fld id="{B7CF8A19-3A9E-4ABC-B336-2FDDE321C72D}" type="slidenum">
-              <a:rPr lang="en-US" smtClean="0"/>
-              <a:pPr/>
-              <a:t>23</a:t>
-            </a:fld>
-            <a:endParaRPr lang="en-US"/>
-          </a:p>
-        </p:txBody>
-      </p:sp>
-    </p:spTree>
-    <p:extLst>
-      <p:ext uri="{BB962C8B-B14F-4D97-AF65-F5344CB8AC3E}">
-        <p14:creationId xmlns:p14="http://schemas.microsoft.com/office/powerpoint/2010/main" val="684225142"/>
-      </p:ext>
-    </p:extLst>
-  </p:cSld>
-  <p:clrMapOvr>
-    <a:masterClrMapping/>
-  </p:clrMapOvr>
-</p:sld>
-</file>
-
 <file path=ppt/slides/slide24.xml><?xml version="1.0" encoding="utf-8"?>
 <p:sld xmlns:a="http://schemas.openxmlformats.org/drawingml/2006/main" xmlns:r="http://schemas.openxmlformats.org/officeDocument/2006/relationships" xmlns:p="http://schemas.openxmlformats.org/presentationml/2006/main">
   <p:cSld>
@@ -9638,7 +11052,7 @@
           <p:cNvPr id="2" name="Title 1">
             <a:extLst>
               <a:ext uri="{FF2B5EF4-FFF2-40B4-BE49-F238E27FC236}">
-                <a16:creationId xmlns:a16="http://schemas.microsoft.com/office/drawing/2014/main" id="{C68202C3-D90E-B4B7-6419-7B227F4A909E}"/>
+                <a16:creationId xmlns:a16="http://schemas.microsoft.com/office/drawing/2014/main" id="{AB1092C9-6560-8BD1-BBA8-43A442D0385E}"/>
               </a:ext>
             </a:extLst>
           </p:cNvPr>
@@ -9656,85 +11070,158 @@
           <a:p>
             <a:r>
               <a:rPr lang="en-US" noProof="0" dirty="0"/>
-              <a:t>Typosquatting​</a:t>
-            </a:r>
-          </a:p>
-        </p:txBody>
-      </p:sp>
-      <p:sp>
-        <p:nvSpPr>
-          <p:cNvPr id="3" name="Content Placeholder 2">
-            <a:extLst>
-              <a:ext uri="{FF2B5EF4-FFF2-40B4-BE49-F238E27FC236}">
-                <a16:creationId xmlns:a16="http://schemas.microsoft.com/office/drawing/2014/main" id="{F3E7BE75-FA1A-36A6-CB80-25ED825AFEE5}"/>
-              </a:ext>
-            </a:extLst>
-          </p:cNvPr>
-          <p:cNvSpPr>
-            <a:spLocks noGrp="1"/>
-          </p:cNvSpPr>
+              <a:t>Phishing and Pharming</a:t>
+            </a:r>
+          </a:p>
+        </p:txBody>
+      </p:sp>
+      <p:pic>
+        <p:nvPicPr>
+          <p:cNvPr id="8194" name="Picture 2">
+            <a:extLst>
+              <a:ext uri="{FF2B5EF4-FFF2-40B4-BE49-F238E27FC236}">
+                <a16:creationId xmlns:a16="http://schemas.microsoft.com/office/drawing/2014/main" id="{A8087FD8-18EF-7725-A78C-DD5CD5C1F239}"/>
+              </a:ext>
+            </a:extLst>
+          </p:cNvPr>
+          <p:cNvPicPr>
+            <a:picLocks noGrp="1" noChangeAspect="1" noChangeArrowheads="1"/>
+          </p:cNvPicPr>
           <p:nvPr>
             <p:ph idx="1"/>
           </p:nvPr>
-        </p:nvSpPr>
-        <p:spPr/>
+        </p:nvPicPr>
+        <p:blipFill>
+          <a:blip r:embed="rId3">
+            <a:extLst>
+              <a:ext uri="{28A0092B-C50C-407E-A947-70E740481C1C}">
+                <a14:useLocalDpi xmlns:a14="http://schemas.microsoft.com/office/drawing/2010/main" val="0"/>
+              </a:ext>
+            </a:extLst>
+          </a:blip>
+          <a:srcRect/>
+          <a:stretch>
+            <a:fillRect/>
+          </a:stretch>
+        </p:blipFill>
+        <p:spPr>
+          <a:xfrm>
+            <a:off x="146050" y="1593815"/>
+            <a:ext cx="4354513" cy="2351158"/>
+          </a:xfrm>
+        </p:spPr>
+      </p:pic>
+      <p:sp>
+        <p:nvSpPr>
+          <p:cNvPr id="4" name="Content Placeholder 3">
+            <a:extLst>
+              <a:ext uri="{FF2B5EF4-FFF2-40B4-BE49-F238E27FC236}">
+                <a16:creationId xmlns:a16="http://schemas.microsoft.com/office/drawing/2014/main" id="{CBC1DA6C-5CE5-6AE4-5CF7-B39FDB27AA93}"/>
+              </a:ext>
+            </a:extLst>
+          </p:cNvPr>
+          <p:cNvSpPr>
+            <a:spLocks noGrp="1"/>
+          </p:cNvSpPr>
+          <p:nvPr>
+            <p:ph idx="12"/>
+          </p:nvPr>
+        </p:nvSpPr>
+        <p:spPr>
+          <a:xfrm>
+            <a:off x="4636383" y="746760"/>
+            <a:ext cx="4380617" cy="4396740"/>
+          </a:xfrm>
+        </p:spPr>
         <p:txBody>
           <a:bodyPr>
-            <a:normAutofit/>
+            <a:normAutofit fontScale="70000" lnSpcReduction="20000"/>
           </a:bodyPr>
           <a:lstStyle/>
           <a:p>
             <a:r>
               <a:rPr lang="en-US" noProof="0" dirty="0"/>
-              <a:t>Make phishing messages more convincing​</a:t>
-            </a:r>
-          </a:p>
-          <a:p>
+              <a:t>Phishing</a:t>
+            </a:r>
+          </a:p>
+          <a:p>
+            <a:pPr lvl="1"/>
             <a:r>
               <a:rPr lang="en-US" noProof="0" dirty="0"/>
-              <a:t>Email spoofing techniques</a:t>
+              <a:t>Trick target into using a malicious resource​</a:t>
             </a:r>
           </a:p>
           <a:p>
             <a:pPr lvl="1"/>
             <a:r>
-              <a:rPr lang="en-US" dirty="0"/>
-              <a:t>From field confusion</a:t>
-            </a:r>
-          </a:p>
-          <a:p>
-            <a:r>
               <a:rPr lang="en-US" noProof="0" dirty="0"/>
-              <a:t>Typosquatting</a:t>
+              <a:t>Spoof legitimate communications and sites​</a:t>
+            </a:r>
+          </a:p>
+          <a:p>
+            <a:r>
+              <a:rPr lang="en-US" noProof="0" dirty="0"/>
+              <a:t>Vishing​</a:t>
             </a:r>
           </a:p>
           <a:p>
             <a:pPr lvl="1"/>
             <a:r>
               <a:rPr lang="en-US" noProof="0" dirty="0"/>
-              <a:t>Cousin domains that look like a trusted domain</a:t>
+              <a:t>Using a voice channel​</a:t>
+            </a:r>
+          </a:p>
+          <a:p>
+            <a:r>
+              <a:rPr lang="en-US" noProof="0" dirty="0"/>
+              <a:t>SMiShing​</a:t>
             </a:r>
           </a:p>
           <a:p>
             <a:pPr lvl="1"/>
+            <a:r>
+              <a:rPr lang="en-US" noProof="0" dirty="0"/>
+              <a:t>Using text messaging​​</a:t>
+            </a:r>
+          </a:p>
+          <a:p>
+            <a:r>
+              <a:rPr lang="en-US" noProof="0" dirty="0"/>
+              <a:t>Passive techniques have less risk of detection​</a:t>
+            </a:r>
+          </a:p>
+          <a:p>
+            <a:r>
+              <a:rPr lang="en-US" noProof="0" dirty="0"/>
+              <a:t>Pharming​</a:t>
+            </a:r>
+          </a:p>
+          <a:p>
+            <a:pPr lvl="1"/>
+            <a:r>
+              <a:rPr lang="en-US" noProof="0" dirty="0"/>
+              <a:t>Redirection by DNS spoofing​</a:t>
+            </a:r>
+          </a:p>
+          <a:p>
             <a:endParaRPr lang="en-US" noProof="0" dirty="0"/>
           </a:p>
         </p:txBody>
       </p:sp>
       <p:sp>
         <p:nvSpPr>
-          <p:cNvPr id="4" name="Slide Number Placeholder 3">
-            <a:extLst>
-              <a:ext uri="{FF2B5EF4-FFF2-40B4-BE49-F238E27FC236}">
-                <a16:creationId xmlns:a16="http://schemas.microsoft.com/office/drawing/2014/main" id="{FD57ABA9-309C-B78A-E847-A8501FD6A562}"/>
-              </a:ext>
-            </a:extLst>
-          </p:cNvPr>
-          <p:cNvSpPr>
-            <a:spLocks noGrp="1"/>
-          </p:cNvSpPr>
-          <p:nvPr>
-            <p:ph type="sldNum" sz="quarter" idx="10"/>
+          <p:cNvPr id="5" name="Slide Number Placeholder 4">
+            <a:extLst>
+              <a:ext uri="{FF2B5EF4-FFF2-40B4-BE49-F238E27FC236}">
+                <a16:creationId xmlns:a16="http://schemas.microsoft.com/office/drawing/2014/main" id="{13739AB0-1366-7EF8-7CE9-C8E0126E91D8}"/>
+              </a:ext>
+            </a:extLst>
+          </p:cNvPr>
+          <p:cNvSpPr>
+            <a:spLocks noGrp="1"/>
+          </p:cNvSpPr>
+          <p:nvPr>
+            <p:ph type="sldNum" sz="quarter" idx="13"/>
           </p:nvPr>
         </p:nvSpPr>
         <p:spPr/>
@@ -9754,7 +11241,7 @@
     </p:spTree>
     <p:extLst>
       <p:ext uri="{BB962C8B-B14F-4D97-AF65-F5344CB8AC3E}">
-        <p14:creationId xmlns:p14="http://schemas.microsoft.com/office/powerpoint/2010/main" val="2553477551"/>
+        <p14:creationId xmlns:p14="http://schemas.microsoft.com/office/powerpoint/2010/main" val="684225142"/>
       </p:ext>
     </p:extLst>
   </p:cSld>
@@ -9786,7 +11273,7 @@
           <p:cNvPr id="2" name="Title 1">
             <a:extLst>
               <a:ext uri="{FF2B5EF4-FFF2-40B4-BE49-F238E27FC236}">
-                <a16:creationId xmlns:a16="http://schemas.microsoft.com/office/drawing/2014/main" id="{8742A5C4-26DE-9A47-4E9A-1550996BC81E}"/>
+                <a16:creationId xmlns:a16="http://schemas.microsoft.com/office/drawing/2014/main" id="{C68202C3-D90E-B4B7-6419-7B227F4A909E}"/>
               </a:ext>
             </a:extLst>
           </p:cNvPr>
@@ -9804,7 +11291,7 @@
           <a:p>
             <a:r>
               <a:rPr lang="en-US" noProof="0" dirty="0"/>
-              <a:t>Business Email Compromise</a:t>
+              <a:t>Typosquatting​</a:t>
             </a:r>
           </a:p>
         </p:txBody>
@@ -9814,7 +11301,7 @@
           <p:cNvPr id="3" name="Content Placeholder 2">
             <a:extLst>
               <a:ext uri="{FF2B5EF4-FFF2-40B4-BE49-F238E27FC236}">
-                <a16:creationId xmlns:a16="http://schemas.microsoft.com/office/drawing/2014/main" id="{7D307D99-A5ED-F527-03F8-8EEAD6EB8076}"/>
+                <a16:creationId xmlns:a16="http://schemas.microsoft.com/office/drawing/2014/main" id="{F3E7BE75-FA1A-36A6-CB80-25ED825AFEE5}"/>
               </a:ext>
             </a:extLst>
           </p:cNvPr>
@@ -9828,71 +11315,45 @@
         <p:spPr/>
         <p:txBody>
           <a:bodyPr>
-            <a:normAutofit fontScale="92500" lnSpcReduction="20000"/>
+            <a:normAutofit/>
           </a:bodyPr>
           <a:lstStyle/>
           <a:p>
             <a:r>
               <a:rPr lang="en-US" noProof="0" dirty="0"/>
-              <a:t>Target phishing/vishing/SMiShing to a specific individual</a:t>
+              <a:t>Make phishing messages more convincing​</a:t>
+            </a:r>
+          </a:p>
+          <a:p>
+            <a:r>
+              <a:rPr lang="en-US" noProof="0" dirty="0"/>
+              <a:t>Email spoofing techniques</a:t>
             </a:r>
           </a:p>
           <a:p>
             <a:pPr lvl="1"/>
             <a:r>
+              <a:rPr lang="en-US" dirty="0"/>
+              <a:t>From field confusion</a:t>
+            </a:r>
+          </a:p>
+          <a:p>
+            <a:r>
               <a:rPr lang="en-US" noProof="0" dirty="0"/>
-              <a:t>Pose as colleague, business partner, or vendor</a:t>
+              <a:t>Typosquatting</a:t>
             </a:r>
           </a:p>
           <a:p>
             <a:pPr lvl="1"/>
             <a:r>
               <a:rPr lang="en-US" noProof="0" dirty="0"/>
-              <a:t>Spear phishing, whaling, CEO fraud, angler phishing, …</a:t>
-            </a:r>
-          </a:p>
-          <a:p>
-            <a:r>
-              <a:rPr lang="en-US" noProof="0" dirty="0"/>
-              <a:t>Brand impersonation and disinformation</a:t>
+              <a:t>Cousin domains that look like a trusted domain</a:t>
             </a:r>
           </a:p>
           <a:p>
             <a:pPr lvl="1"/>
-            <a:r>
-              <a:rPr lang="en-US" noProof="0" dirty="0"/>
-              <a:t>Make convincing fake phishing messages, business correspondence, and pharming websites</a:t>
-            </a:r>
-          </a:p>
-          <a:p>
-            <a:pPr lvl="1"/>
-            <a:r>
-              <a:rPr lang="en-US" noProof="0" dirty="0"/>
-              <a:t>Disinformation versus misinformation</a:t>
-            </a:r>
-          </a:p>
-          <a:p>
-            <a:r>
-              <a:rPr lang="en-US" dirty="0"/>
-              <a:t>Watering hole attack</a:t>
-            </a:r>
-          </a:p>
-          <a:p>
-            <a:pPr lvl="1"/>
-            <a:r>
-              <a:rPr lang="en-US" noProof="0" dirty="0"/>
-              <a:t>Compromise a third-party site that the threat actor knows is used by the target</a:t>
-            </a:r>
-          </a:p>
-          <a:p>
             <a:endParaRPr lang="en-US" noProof="0" dirty="0"/>
           </a:p>
-          <a:p>
-            <a:endParaRPr lang="en-US" noProof="0" dirty="0"/>
-          </a:p>
-          <a:p>
-            <a:endParaRPr lang="en-US" noProof="0" dirty="0"/>
-          </a:p>
         </p:txBody>
       </p:sp>
       <p:sp>
@@ -9900,7 +11361,7 @@
           <p:cNvPr id="4" name="Slide Number Placeholder 3">
             <a:extLst>
               <a:ext uri="{FF2B5EF4-FFF2-40B4-BE49-F238E27FC236}">
-                <a16:creationId xmlns:a16="http://schemas.microsoft.com/office/drawing/2014/main" id="{EFA39FC3-E69E-A8C9-F999-53A47A3B473C}"/>
+                <a16:creationId xmlns:a16="http://schemas.microsoft.com/office/drawing/2014/main" id="{FD57ABA9-309C-B78A-E847-A8501FD6A562}"/>
               </a:ext>
             </a:extLst>
           </p:cNvPr>
@@ -9928,7 +11389,7 @@
     </p:spTree>
     <p:extLst>
       <p:ext uri="{BB962C8B-B14F-4D97-AF65-F5344CB8AC3E}">
-        <p14:creationId xmlns:p14="http://schemas.microsoft.com/office/powerpoint/2010/main" val="744962618"/>
+        <p14:creationId xmlns:p14="http://schemas.microsoft.com/office/powerpoint/2010/main" val="2553477551"/>
       </p:ext>
     </p:extLst>
   </p:cSld>
@@ -9957,90 +11418,115 @@
       </p:grpSpPr>
       <p:sp>
         <p:nvSpPr>
-          <p:cNvPr id="2" name="Content Placeholder 1">
-            <a:extLst>
-              <a:ext uri="{FF2B5EF4-FFF2-40B4-BE49-F238E27FC236}">
-                <a16:creationId xmlns:a16="http://schemas.microsoft.com/office/drawing/2014/main" id="{F4D88CD3-752B-889F-2492-33F1622D6817}"/>
-              </a:ext>
-            </a:extLst>
-          </p:cNvPr>
-          <p:cNvSpPr>
-            <a:spLocks noGrp="1"/>
-          </p:cNvSpPr>
-          <p:nvPr>
-            <p:ph sz="quarter" idx="11"/>
+          <p:cNvPr id="2" name="Title 1">
+            <a:extLst>
+              <a:ext uri="{FF2B5EF4-FFF2-40B4-BE49-F238E27FC236}">
+                <a16:creationId xmlns:a16="http://schemas.microsoft.com/office/drawing/2014/main" id="{8742A5C4-26DE-9A47-4E9A-1550996BC81E}"/>
+              </a:ext>
+            </a:extLst>
+          </p:cNvPr>
+          <p:cNvSpPr>
+            <a:spLocks noGrp="1"/>
+          </p:cNvSpPr>
+          <p:nvPr>
+            <p:ph type="title"/>
           </p:nvPr>
         </p:nvSpPr>
         <p:spPr/>
         <p:txBody>
+          <a:bodyPr/>
+          <a:lstStyle/>
+          <a:p>
+            <a:r>
+              <a:rPr lang="en-US" noProof="0" dirty="0"/>
+              <a:t>Business Email Compromise</a:t>
+            </a:r>
+          </a:p>
+        </p:txBody>
+      </p:sp>
+      <p:sp>
+        <p:nvSpPr>
+          <p:cNvPr id="3" name="Content Placeholder 2">
+            <a:extLst>
+              <a:ext uri="{FF2B5EF4-FFF2-40B4-BE49-F238E27FC236}">
+                <a16:creationId xmlns:a16="http://schemas.microsoft.com/office/drawing/2014/main" id="{7D307D99-A5ED-F527-03F8-8EEAD6EB8076}"/>
+              </a:ext>
+            </a:extLst>
+          </p:cNvPr>
+          <p:cNvSpPr>
+            <a:spLocks noGrp="1"/>
+          </p:cNvSpPr>
+          <p:nvPr>
+            <p:ph idx="1"/>
+          </p:nvPr>
+        </p:nvSpPr>
+        <p:spPr/>
+        <p:txBody>
           <a:bodyPr>
-            <a:normAutofit/>
+            <a:normAutofit fontScale="92500" lnSpcReduction="20000"/>
           </a:bodyPr>
           <a:lstStyle/>
           <a:p>
             <a:r>
+              <a:rPr lang="en-US" noProof="0" dirty="0"/>
+              <a:t>Target phishing/vishing/SMiShing to a specific individual</a:t>
+            </a:r>
+          </a:p>
+          <a:p>
+            <a:pPr lvl="1"/>
+            <a:r>
+              <a:rPr lang="en-US" noProof="0" dirty="0"/>
+              <a:t>Pose as colleague, business partner, or vendor</a:t>
+            </a:r>
+          </a:p>
+          <a:p>
+            <a:pPr lvl="1"/>
+            <a:r>
+              <a:rPr lang="en-US" noProof="0" dirty="0"/>
+              <a:t>Spear phishing, whaling, CEO fraud, angler phishing, …</a:t>
+            </a:r>
+          </a:p>
+          <a:p>
+            <a:r>
+              <a:rPr lang="en-US" noProof="0" dirty="0"/>
+              <a:t>Brand impersonation and disinformation</a:t>
+            </a:r>
+          </a:p>
+          <a:p>
+            <a:pPr lvl="1"/>
+            <a:r>
+              <a:rPr lang="en-US" noProof="0" dirty="0"/>
+              <a:t>Make convincing fake phishing messages, business correspondence, and pharming websites</a:t>
+            </a:r>
+          </a:p>
+          <a:p>
+            <a:pPr lvl="1"/>
+            <a:r>
+              <a:rPr lang="en-US" noProof="0" dirty="0"/>
+              <a:t>Disinformation versus misinformation</a:t>
+            </a:r>
+          </a:p>
+          <a:p>
+            <a:r>
               <a:rPr lang="en-US" dirty="0"/>
-              <a:t>Social engineering</a:t>
-            </a:r>
-          </a:p>
-          <a:p>
-            <a:r>
-              <a:rPr lang="en-US" dirty="0"/>
-              <a:t>Human vectors</a:t>
-            </a:r>
-          </a:p>
-          <a:p>
-            <a:r>
-              <a:rPr lang="en-US" dirty="0"/>
-              <a:t>Impersonation and pretexting​</a:t>
-            </a:r>
-          </a:p>
-          <a:p>
-            <a:r>
-              <a:rPr lang="en-US" dirty="0"/>
-              <a:t>Phishing and pharming</a:t>
-            </a:r>
-          </a:p>
-          <a:p>
-            <a:r>
-              <a:rPr lang="en-US" dirty="0"/>
-              <a:t>Typosquatting​</a:t>
-            </a:r>
-          </a:p>
-          <a:p>
-            <a:r>
-              <a:rPr lang="en-US" dirty="0"/>
-              <a:t>Business email compromise</a:t>
-            </a:r>
-          </a:p>
-        </p:txBody>
-      </p:sp>
-      <p:sp>
-        <p:nvSpPr>
-          <p:cNvPr id="3" name="Title 2">
-            <a:extLst>
-              <a:ext uri="{FF2B5EF4-FFF2-40B4-BE49-F238E27FC236}">
-                <a16:creationId xmlns:a16="http://schemas.microsoft.com/office/drawing/2014/main" id="{067FA03E-66AA-D825-D930-DD7B57D7F0BF}"/>
-              </a:ext>
-            </a:extLst>
-          </p:cNvPr>
-          <p:cNvSpPr>
-            <a:spLocks noGrp="1"/>
-          </p:cNvSpPr>
-          <p:nvPr>
-            <p:ph type="title"/>
-          </p:nvPr>
-        </p:nvSpPr>
-        <p:spPr/>
-        <p:txBody>
-          <a:bodyPr/>
-          <a:lstStyle/>
-          <a:p>
-            <a:r>
-              <a:rPr lang="en-GB" dirty="0"/>
-              <a:t>Social Engineering</a:t>
-            </a:r>
-            <a:endParaRPr lang="en-US" dirty="0"/>
+              <a:t>Watering hole attack</a:t>
+            </a:r>
+          </a:p>
+          <a:p>
+            <a:pPr lvl="1"/>
+            <a:r>
+              <a:rPr lang="en-US" noProof="0" dirty="0"/>
+              <a:t>Compromise a third-party site that the threat actor knows is used by the target</a:t>
+            </a:r>
+          </a:p>
+          <a:p>
+            <a:endParaRPr lang="en-US" noProof="0" dirty="0"/>
+          </a:p>
+          <a:p>
+            <a:endParaRPr lang="en-US" noProof="0" dirty="0"/>
+          </a:p>
+          <a:p>
+            <a:endParaRPr lang="en-US" noProof="0" dirty="0"/>
           </a:p>
         </p:txBody>
       </p:sp>
@@ -10049,15 +11535,15 @@
           <p:cNvPr id="4" name="Slide Number Placeholder 3">
             <a:extLst>
               <a:ext uri="{FF2B5EF4-FFF2-40B4-BE49-F238E27FC236}">
-                <a16:creationId xmlns:a16="http://schemas.microsoft.com/office/drawing/2014/main" id="{2D379A87-32B3-1E9E-19D9-F440CC1BC0DE}"/>
-              </a:ext>
-            </a:extLst>
-          </p:cNvPr>
-          <p:cNvSpPr>
-            <a:spLocks noGrp="1"/>
-          </p:cNvSpPr>
-          <p:nvPr>
-            <p:ph type="sldNum" sz="quarter" idx="12"/>
+                <a16:creationId xmlns:a16="http://schemas.microsoft.com/office/drawing/2014/main" id="{EFA39FC3-E69E-A8C9-F999-53A47A3B473C}"/>
+              </a:ext>
+            </a:extLst>
+          </p:cNvPr>
+          <p:cNvSpPr>
+            <a:spLocks noGrp="1"/>
+          </p:cNvSpPr>
+          <p:nvPr>
+            <p:ph type="sldNum" sz="quarter" idx="10"/>
           </p:nvPr>
         </p:nvSpPr>
         <p:spPr/>
@@ -10077,7 +11563,7 @@
     </p:spTree>
     <p:extLst>
       <p:ext uri="{BB962C8B-B14F-4D97-AF65-F5344CB8AC3E}">
-        <p14:creationId xmlns:p14="http://schemas.microsoft.com/office/powerpoint/2010/main" val="114506518"/>
+        <p14:creationId xmlns:p14="http://schemas.microsoft.com/office/powerpoint/2010/main" val="744962618"/>
       </p:ext>
     </p:extLst>
   </p:cSld>
@@ -10106,6 +11592,243 @@
       </p:grpSpPr>
       <p:sp>
         <p:nvSpPr>
+          <p:cNvPr id="2" name="Content Placeholder 1">
+            <a:extLst>
+              <a:ext uri="{FF2B5EF4-FFF2-40B4-BE49-F238E27FC236}">
+                <a16:creationId xmlns:a16="http://schemas.microsoft.com/office/drawing/2014/main" id="{F4D88CD3-752B-889F-2492-33F1622D6817}"/>
+              </a:ext>
+            </a:extLst>
+          </p:cNvPr>
+          <p:cNvSpPr>
+            <a:spLocks noGrp="1"/>
+          </p:cNvSpPr>
+          <p:nvPr>
+            <p:ph sz="quarter" idx="11"/>
+          </p:nvPr>
+        </p:nvSpPr>
+        <p:spPr/>
+        <p:txBody>
+          <a:bodyPr>
+            <a:normAutofit/>
+          </a:bodyPr>
+          <a:lstStyle/>
+          <a:p>
+            <a:r>
+              <a:rPr lang="en-US" dirty="0"/>
+              <a:t>Social engineering</a:t>
+            </a:r>
+          </a:p>
+          <a:p>
+            <a:r>
+              <a:rPr lang="en-US" dirty="0"/>
+              <a:t>Human vectors</a:t>
+            </a:r>
+          </a:p>
+          <a:p>
+            <a:r>
+              <a:rPr lang="en-US" dirty="0"/>
+              <a:t>Impersonation and pretexting​</a:t>
+            </a:r>
+          </a:p>
+          <a:p>
+            <a:r>
+              <a:rPr lang="en-US" dirty="0"/>
+              <a:t>Phishing and pharming</a:t>
+            </a:r>
+          </a:p>
+          <a:p>
+            <a:r>
+              <a:rPr lang="en-US" dirty="0"/>
+              <a:t>Typosquatting​</a:t>
+            </a:r>
+          </a:p>
+          <a:p>
+            <a:r>
+              <a:rPr lang="en-US" dirty="0"/>
+              <a:t>Business email compromise</a:t>
+            </a:r>
+          </a:p>
+        </p:txBody>
+      </p:sp>
+      <p:sp>
+        <p:nvSpPr>
+          <p:cNvPr id="3" name="Title 2">
+            <a:extLst>
+              <a:ext uri="{FF2B5EF4-FFF2-40B4-BE49-F238E27FC236}">
+                <a16:creationId xmlns:a16="http://schemas.microsoft.com/office/drawing/2014/main" id="{067FA03E-66AA-D825-D930-DD7B57D7F0BF}"/>
+              </a:ext>
+            </a:extLst>
+          </p:cNvPr>
+          <p:cNvSpPr>
+            <a:spLocks noGrp="1"/>
+          </p:cNvSpPr>
+          <p:nvPr>
+            <p:ph type="title"/>
+          </p:nvPr>
+        </p:nvSpPr>
+        <p:spPr/>
+        <p:txBody>
+          <a:bodyPr/>
+          <a:lstStyle/>
+          <a:p>
+            <a:r>
+              <a:rPr lang="en-GB" dirty="0"/>
+              <a:t>Social Engineering</a:t>
+            </a:r>
+            <a:endParaRPr lang="en-US" dirty="0"/>
+          </a:p>
+        </p:txBody>
+      </p:sp>
+      <p:sp>
+        <p:nvSpPr>
+          <p:cNvPr id="4" name="Slide Number Placeholder 3">
+            <a:extLst>
+              <a:ext uri="{FF2B5EF4-FFF2-40B4-BE49-F238E27FC236}">
+                <a16:creationId xmlns:a16="http://schemas.microsoft.com/office/drawing/2014/main" id="{2D379A87-32B3-1E9E-19D9-F440CC1BC0DE}"/>
+              </a:ext>
+            </a:extLst>
+          </p:cNvPr>
+          <p:cNvSpPr>
+            <a:spLocks noGrp="1"/>
+          </p:cNvSpPr>
+          <p:nvPr>
+            <p:ph type="sldNum" sz="quarter" idx="12"/>
+          </p:nvPr>
+        </p:nvSpPr>
+        <p:spPr/>
+        <p:txBody>
+          <a:bodyPr/>
+          <a:lstStyle/>
+          <a:p>
+            <a:fld id="{B7CF8A19-3A9E-4ABC-B336-2FDDE321C72D}" type="slidenum">
+              <a:rPr lang="en-US" smtClean="0"/>
+              <a:pPr/>
+              <a:t>27</a:t>
+            </a:fld>
+            <a:endParaRPr lang="en-US"/>
+          </a:p>
+        </p:txBody>
+      </p:sp>
+    </p:spTree>
+    <p:extLst>
+      <p:ext uri="{BB962C8B-B14F-4D97-AF65-F5344CB8AC3E}">
+        <p14:creationId xmlns:p14="http://schemas.microsoft.com/office/powerpoint/2010/main" val="114506518"/>
+      </p:ext>
+    </p:extLst>
+  </p:cSld>
+  <p:clrMapOvr>
+    <a:masterClrMapping/>
+  </p:clrMapOvr>
+</p:sld>
+</file>
+
+<file path=ppt/slides/slide28.xml><?xml version="1.0" encoding="utf-8"?>
+<p:sld xmlns:a="http://schemas.openxmlformats.org/drawingml/2006/main" xmlns:r="http://schemas.openxmlformats.org/officeDocument/2006/relationships" xmlns:p="http://schemas.openxmlformats.org/presentationml/2006/main">
+  <p:cSld>
+    <p:spTree>
+      <p:nvGrpSpPr>
+        <p:cNvPr id="1" name=""/>
+        <p:cNvGrpSpPr/>
+        <p:nvPr/>
+      </p:nvGrpSpPr>
+      <p:grpSpPr>
+        <a:xfrm>
+          <a:off x="0" y="0"/>
+          <a:ext cx="0" cy="0"/>
+          <a:chOff x="0" y="0"/>
+          <a:chExt cx="0" cy="0"/>
+        </a:xfrm>
+      </p:grpSpPr>
+      <p:sp>
+        <p:nvSpPr>
+          <p:cNvPr id="4" name="Slide Number Placeholder 3">
+            <a:extLst>
+              <a:ext uri="{FF2B5EF4-FFF2-40B4-BE49-F238E27FC236}">
+                <a16:creationId xmlns:a16="http://schemas.microsoft.com/office/drawing/2014/main" id="{15CBB9D5-2DAC-6A7F-ADE7-8B53182EF9DC}"/>
+              </a:ext>
+            </a:extLst>
+          </p:cNvPr>
+          <p:cNvSpPr>
+            <a:spLocks noGrp="1"/>
+          </p:cNvSpPr>
+          <p:nvPr>
+            <p:ph type="sldNum" sz="quarter" idx="13"/>
+          </p:nvPr>
+        </p:nvSpPr>
+        <p:spPr/>
+        <p:txBody>
+          <a:bodyPr/>
+          <a:lstStyle/>
+          <a:p>
+            <a:fld id="{B7CF8A19-3A9E-4ABC-B336-2FDDE321C72D}" type="slidenum">
+              <a:rPr lang="en-US" smtClean="0"/>
+              <a:pPr/>
+              <a:t>28</a:t>
+            </a:fld>
+            <a:endParaRPr lang="en-US"/>
+          </a:p>
+        </p:txBody>
+      </p:sp>
+      <p:sp>
+        <p:nvSpPr>
+          <p:cNvPr id="5" name="Content Placeholder 4">
+            <a:extLst>
+              <a:ext uri="{FF2B5EF4-FFF2-40B4-BE49-F238E27FC236}">
+                <a16:creationId xmlns:a16="http://schemas.microsoft.com/office/drawing/2014/main" id="{EEF1EDF6-C418-A1A3-FCF3-F6002DA1003E}"/>
+              </a:ext>
+            </a:extLst>
+          </p:cNvPr>
+          <p:cNvSpPr>
+            <a:spLocks noGrp="1"/>
+          </p:cNvSpPr>
+          <p:nvPr>
+            <p:ph sz="quarter" idx="14"/>
+          </p:nvPr>
+        </p:nvSpPr>
+        <p:spPr/>
+        <p:txBody>
+          <a:bodyPr/>
+          <a:lstStyle/>
+          <a:p>
+            <a:r>
+              <a:rPr lang="en-US" dirty="0"/>
+              <a:t>Assisted Lab: Using SET to Perform Social Engineering</a:t>
+            </a:r>
+          </a:p>
+        </p:txBody>
+      </p:sp>
+    </p:spTree>
+    <p:extLst>
+      <p:ext uri="{BB962C8B-B14F-4D97-AF65-F5344CB8AC3E}">
+        <p14:creationId xmlns:p14="http://schemas.microsoft.com/office/powerpoint/2010/main" val="1628770684"/>
+      </p:ext>
+    </p:extLst>
+  </p:cSld>
+  <p:clrMapOvr>
+    <a:masterClrMapping/>
+  </p:clrMapOvr>
+</p:sld>
+</file>
+
+<file path=ppt/slides/slide29.xml><?xml version="1.0" encoding="utf-8"?>
+<p:sld xmlns:a="http://schemas.openxmlformats.org/drawingml/2006/main" xmlns:r="http://schemas.openxmlformats.org/officeDocument/2006/relationships" xmlns:p="http://schemas.openxmlformats.org/presentationml/2006/main">
+  <p:cSld>
+    <p:spTree>
+      <p:nvGrpSpPr>
+        <p:cNvPr id="1" name=""/>
+        <p:cNvGrpSpPr/>
+        <p:nvPr/>
+      </p:nvGrpSpPr>
+      <p:grpSpPr>
+        <a:xfrm>
+          <a:off x="0" y="0"/>
+          <a:ext cx="0" cy="0"/>
+          <a:chOff x="0" y="0"/>
+          <a:chExt cx="0" cy="0"/>
+        </a:xfrm>
+      </p:grpSpPr>
+      <p:sp>
+        <p:nvSpPr>
           <p:cNvPr id="2" name="Title 1">
             <a:extLst>
               <a:ext uri="{FF2B5EF4-FFF2-40B4-BE49-F238E27FC236}">
@@ -10221,7 +11944,7 @@
             <a:fld id="{B7CF8A19-3A9E-4ABC-B336-2FDDE321C72D}" type="slidenum">
               <a:rPr lang="en-US" smtClean="0"/>
               <a:pPr/>
-              <a:t>27</a:t>
+              <a:t>29</a:t>
             </a:fld>
             <a:endParaRPr lang="en-US"/>
           </a:p>
@@ -12351,19 +14074,6 @@
 </file>
 
 <file path=customXml/item1.xml><?xml version="1.0" encoding="utf-8"?>
-<p:properties xmlns:p="http://schemas.microsoft.com/office/2006/metadata/properties" xmlns:xsi="http://www.w3.org/2001/XMLSchema-instance" xmlns:pc="http://schemas.microsoft.com/office/infopath/2007/PartnerControls">
-  <documentManagement>
-    <_ip_UnifiedCompliancePolicyUIAction xmlns="http://schemas.microsoft.com/sharepoint/v3" xsi:nil="true"/>
-    <TaxCatchAll xmlns="315eb565-7267-4a95-9087-2f433ded3c8b" xsi:nil="true"/>
-    <_ip_UnifiedCompliancePolicyProperties xmlns="http://schemas.microsoft.com/sharepoint/v3" xsi:nil="true"/>
-    <lcf76f155ced4ddcb4097134ff3c332f xmlns="95a46270-66ec-4bdf-aabc-d78887d51418">
-      <Terms xmlns="http://schemas.microsoft.com/office/infopath/2007/PartnerControls"/>
-    </lcf76f155ced4ddcb4097134ff3c332f>
-  </documentManagement>
-</p:properties>
-</file>
-
-<file path=customXml/item2.xml><?xml version="1.0" encoding="utf-8"?>
 <ct:contentTypeSchema xmlns:ct="http://schemas.microsoft.com/office/2006/metadata/contentType" xmlns:ma="http://schemas.microsoft.com/office/2006/metadata/properties/metaAttributes" ct:_="" ma:_="" ma:contentTypeName="Document" ma:contentTypeID="0x010100F8AB8BE3257A504EB15FA3D006F5CE14" ma:contentTypeVersion="20" ma:contentTypeDescription="Create a new document." ma:contentTypeScope="" ma:versionID="ed86e5399dbebefe12b00acc00006398">
   <xsd:schema xmlns:xsd="http://www.w3.org/2001/XMLSchema" xmlns:xs="http://www.w3.org/2001/XMLSchema" xmlns:p="http://schemas.microsoft.com/office/2006/metadata/properties" xmlns:ns1="http://schemas.microsoft.com/sharepoint/v3" xmlns:ns2="95a46270-66ec-4bdf-aabc-d78887d51418" xmlns:ns3="315eb565-7267-4a95-9087-2f433ded3c8b" targetNamespace="http://schemas.microsoft.com/office/2006/metadata/properties" ma:root="true" ma:fieldsID="d58846d2f795cf77eba5ad3af37f17c8" ns1:_="" ns2:_="" ns3:_="">
     <xsd:import namespace="http://schemas.microsoft.com/sharepoint/v3"/>
@@ -12629,6 +14339,19 @@
 </ct:contentTypeSchema>
 </file>
 
+<file path=customXml/item2.xml><?xml version="1.0" encoding="utf-8"?>
+<p:properties xmlns:p="http://schemas.microsoft.com/office/2006/metadata/properties" xmlns:xsi="http://www.w3.org/2001/XMLSchema-instance" xmlns:pc="http://schemas.microsoft.com/office/infopath/2007/PartnerControls">
+  <documentManagement>
+    <_ip_UnifiedCompliancePolicyUIAction xmlns="http://schemas.microsoft.com/sharepoint/v3" xsi:nil="true"/>
+    <TaxCatchAll xmlns="315eb565-7267-4a95-9087-2f433ded3c8b" xsi:nil="true"/>
+    <_ip_UnifiedCompliancePolicyProperties xmlns="http://schemas.microsoft.com/sharepoint/v3" xsi:nil="true"/>
+    <lcf76f155ced4ddcb4097134ff3c332f xmlns="95a46270-66ec-4bdf-aabc-d78887d51418">
+      <Terms xmlns="http://schemas.microsoft.com/office/infopath/2007/PartnerControls"/>
+    </lcf76f155ced4ddcb4097134ff3c332f>
+  </documentManagement>
+</p:properties>
+</file>
+
 <file path=customXml/item3.xml><?xml version="1.0" encoding="utf-8"?>
 <?mso-contentType ?>
 <FormTemplates xmlns="http://schemas.microsoft.com/sharepoint/v3/contenttype/forms">
@@ -12639,24 +14362,6 @@
 </file>
 
 <file path=customXml/itemProps1.xml><?xml version="1.0" encoding="utf-8"?>
-<ds:datastoreItem xmlns:ds="http://schemas.openxmlformats.org/officeDocument/2006/customXml" ds:itemID="{79804A4A-BEBA-46F7-8D91-096B77966F98}">
-  <ds:schemaRefs>
-    <ds:schemaRef ds:uri="http://purl.org/dc/terms/"/>
-    <ds:schemaRef ds:uri="http://purl.org/dc/dcmitype/"/>
-    <ds:schemaRef ds:uri="http://purl.org/dc/elements/1.1/"/>
-    <ds:schemaRef ds:uri="http://schemas.microsoft.com/office/2006/documentManagement/types"/>
-    <ds:schemaRef ds:uri="95a46270-66ec-4bdf-aabc-d78887d51418"/>
-    <ds:schemaRef ds:uri="http://schemas.microsoft.com/office/infopath/2007/PartnerControls"/>
-    <ds:schemaRef ds:uri="http://schemas.microsoft.com/office/2006/metadata/properties"/>
-    <ds:schemaRef ds:uri="http://schemas.openxmlformats.org/package/2006/metadata/core-properties"/>
-    <ds:schemaRef ds:uri="315eb565-7267-4a95-9087-2f433ded3c8b"/>
-    <ds:schemaRef ds:uri="http://schemas.microsoft.com/sharepoint/v3"/>
-    <ds:schemaRef ds:uri="http://www.w3.org/XML/1998/namespace"/>
-  </ds:schemaRefs>
-</ds:datastoreItem>
-</file>
-
-<file path=customXml/itemProps2.xml><?xml version="1.0" encoding="utf-8"?>
 <ds:datastoreItem xmlns:ds="http://schemas.openxmlformats.org/officeDocument/2006/customXml" ds:itemID="{EC6AC144-B87D-452B-9F29-102FBEA13DC3}">
   <ds:schemaRefs>
     <ds:schemaRef ds:uri="http://schemas.microsoft.com/office/2006/metadata/contentType"/>
@@ -12676,6 +14381,24 @@
 </ds:datastoreItem>
 </file>
 
+<file path=customXml/itemProps2.xml><?xml version="1.0" encoding="utf-8"?>
+<ds:datastoreItem xmlns:ds="http://schemas.openxmlformats.org/officeDocument/2006/customXml" ds:itemID="{79804A4A-BEBA-46F7-8D91-096B77966F98}">
+  <ds:schemaRefs>
+    <ds:schemaRef ds:uri="http://purl.org/dc/terms/"/>
+    <ds:schemaRef ds:uri="http://purl.org/dc/dcmitype/"/>
+    <ds:schemaRef ds:uri="http://purl.org/dc/elements/1.1/"/>
+    <ds:schemaRef ds:uri="http://schemas.microsoft.com/office/2006/documentManagement/types"/>
+    <ds:schemaRef ds:uri="95a46270-66ec-4bdf-aabc-d78887d51418"/>
+    <ds:schemaRef ds:uri="http://schemas.microsoft.com/office/infopath/2007/PartnerControls"/>
+    <ds:schemaRef ds:uri="http://schemas.microsoft.com/office/2006/metadata/properties"/>
+    <ds:schemaRef ds:uri="http://schemas.openxmlformats.org/package/2006/metadata/core-properties"/>
+    <ds:schemaRef ds:uri="315eb565-7267-4a95-9087-2f433ded3c8b"/>
+    <ds:schemaRef ds:uri="http://schemas.microsoft.com/sharepoint/v3"/>
+    <ds:schemaRef ds:uri="http://www.w3.org/XML/1998/namespace"/>
+  </ds:schemaRefs>
+</ds:datastoreItem>
+</file>
+
 <file path=customXml/itemProps3.xml><?xml version="1.0" encoding="utf-8"?>
 <ds:datastoreItem xmlns:ds="http://schemas.openxmlformats.org/officeDocument/2006/customXml" ds:itemID="{EA2CFB8D-1019-43EC-BFD1-51DA40016399}">
   <ds:schemaRefs>
